--- a/RISCVstage2.pptx
+++ b/RISCVstage2.pptx
@@ -616,7 +616,7 @@
           <a:p>
             <a:fld id="{51AFF834-1BEC-4F95-9622-28B5DCC1FE16}" type="datetimeFigureOut">
               <a:rPr lang="en-US" smtClean="0"/>
-              <a:t>3/10/2026</a:t>
+              <a:t>4/5/2026</a:t>
             </a:fld>
             <a:endParaRPr lang="en-US"/>
           </a:p>
@@ -814,7 +814,7 @@
           <a:p>
             <a:fld id="{51AFF834-1BEC-4F95-9622-28B5DCC1FE16}" type="datetimeFigureOut">
               <a:rPr lang="en-US" smtClean="0"/>
-              <a:t>3/10/2026</a:t>
+              <a:t>4/5/2026</a:t>
             </a:fld>
             <a:endParaRPr lang="en-US"/>
           </a:p>
@@ -1022,7 +1022,7 @@
           <a:p>
             <a:fld id="{51AFF834-1BEC-4F95-9622-28B5DCC1FE16}" type="datetimeFigureOut">
               <a:rPr lang="en-US" smtClean="0"/>
-              <a:t>3/10/2026</a:t>
+              <a:t>4/5/2026</a:t>
             </a:fld>
             <a:endParaRPr lang="en-US"/>
           </a:p>
@@ -1220,7 +1220,7 @@
           <a:p>
             <a:fld id="{51AFF834-1BEC-4F95-9622-28B5DCC1FE16}" type="datetimeFigureOut">
               <a:rPr lang="en-US" smtClean="0"/>
-              <a:t>3/10/2026</a:t>
+              <a:t>4/5/2026</a:t>
             </a:fld>
             <a:endParaRPr lang="en-US"/>
           </a:p>
@@ -1495,7 +1495,7 @@
           <a:p>
             <a:fld id="{51AFF834-1BEC-4F95-9622-28B5DCC1FE16}" type="datetimeFigureOut">
               <a:rPr lang="en-US" smtClean="0"/>
-              <a:t>3/10/2026</a:t>
+              <a:t>4/5/2026</a:t>
             </a:fld>
             <a:endParaRPr lang="en-US"/>
           </a:p>
@@ -1760,7 +1760,7 @@
           <a:p>
             <a:fld id="{51AFF834-1BEC-4F95-9622-28B5DCC1FE16}" type="datetimeFigureOut">
               <a:rPr lang="en-US" smtClean="0"/>
-              <a:t>3/10/2026</a:t>
+              <a:t>4/5/2026</a:t>
             </a:fld>
             <a:endParaRPr lang="en-US"/>
           </a:p>
@@ -2172,7 +2172,7 @@
           <a:p>
             <a:fld id="{51AFF834-1BEC-4F95-9622-28B5DCC1FE16}" type="datetimeFigureOut">
               <a:rPr lang="en-US" smtClean="0"/>
-              <a:t>3/10/2026</a:t>
+              <a:t>4/5/2026</a:t>
             </a:fld>
             <a:endParaRPr lang="en-US"/>
           </a:p>
@@ -2313,7 +2313,7 @@
           <a:p>
             <a:fld id="{51AFF834-1BEC-4F95-9622-28B5DCC1FE16}" type="datetimeFigureOut">
               <a:rPr lang="en-US" smtClean="0"/>
-              <a:t>3/10/2026</a:t>
+              <a:t>4/5/2026</a:t>
             </a:fld>
             <a:endParaRPr lang="en-US"/>
           </a:p>
@@ -2426,7 +2426,7 @@
           <a:p>
             <a:fld id="{51AFF834-1BEC-4F95-9622-28B5DCC1FE16}" type="datetimeFigureOut">
               <a:rPr lang="en-US" smtClean="0"/>
-              <a:t>3/10/2026</a:t>
+              <a:t>4/5/2026</a:t>
             </a:fld>
             <a:endParaRPr lang="en-US"/>
           </a:p>
@@ -2737,7 +2737,7 @@
           <a:p>
             <a:fld id="{51AFF834-1BEC-4F95-9622-28B5DCC1FE16}" type="datetimeFigureOut">
               <a:rPr lang="en-US" smtClean="0"/>
-              <a:t>3/10/2026</a:t>
+              <a:t>4/5/2026</a:t>
             </a:fld>
             <a:endParaRPr lang="en-US"/>
           </a:p>
@@ -3025,7 +3025,7 @@
           <a:p>
             <a:fld id="{51AFF834-1BEC-4F95-9622-28B5DCC1FE16}" type="datetimeFigureOut">
               <a:rPr lang="en-US" smtClean="0"/>
-              <a:t>3/10/2026</a:t>
+              <a:t>4/5/2026</a:t>
             </a:fld>
             <a:endParaRPr lang="en-US"/>
           </a:p>
@@ -3266,7 +3266,7 @@
           <a:p>
             <a:fld id="{51AFF834-1BEC-4F95-9622-28B5DCC1FE16}" type="datetimeFigureOut">
               <a:rPr lang="en-US" smtClean="0"/>
-              <a:t>3/10/2026</a:t>
+              <a:t>4/5/2026</a:t>
             </a:fld>
             <a:endParaRPr lang="en-US"/>
           </a:p>
@@ -5553,50 +5553,6 @@
           </a:fontRef>
         </p:style>
       </p:cxnSp>
-      <p:cxnSp>
-        <p:nvCxnSpPr>
-          <p:cNvPr id="89" name="Straight Arrow Connector 88">
-            <a:extLst>
-              <a:ext uri="{FF2B5EF4-FFF2-40B4-BE49-F238E27FC236}">
-                <a16:creationId xmlns:a16="http://schemas.microsoft.com/office/drawing/2014/main" id="{F54A266D-F4C6-7070-9203-F459E46AE102}"/>
-              </a:ext>
-            </a:extLst>
-          </p:cNvPr>
-          <p:cNvCxnSpPr>
-            <a:cxnSpLocks/>
-          </p:cNvCxnSpPr>
-          <p:nvPr/>
-        </p:nvCxnSpPr>
-        <p:spPr>
-          <a:xfrm>
-            <a:off x="1620962" y="4519030"/>
-            <a:ext cx="475825" cy="0"/>
-          </a:xfrm>
-          <a:prstGeom prst="straightConnector1">
-            <a:avLst/>
-          </a:prstGeom>
-          <a:ln>
-            <a:solidFill>
-              <a:srgbClr val="FF0000"/>
-            </a:solidFill>
-            <a:tailEnd type="triangle"/>
-          </a:ln>
-        </p:spPr>
-        <p:style>
-          <a:lnRef idx="2">
-            <a:schemeClr val="accent1"/>
-          </a:lnRef>
-          <a:fillRef idx="0">
-            <a:schemeClr val="accent1"/>
-          </a:fillRef>
-          <a:effectRef idx="1">
-            <a:schemeClr val="accent1"/>
-          </a:effectRef>
-          <a:fontRef idx="minor">
-            <a:schemeClr val="tx1"/>
-          </a:fontRef>
-        </p:style>
-      </p:cxnSp>
       <p:sp>
         <p:nvSpPr>
           <p:cNvPr id="90" name="Rectangle 89">
@@ -6454,12 +6410,17 @@
         </p:nvCxnSpPr>
         <p:spPr>
           <a:xfrm flipH="1">
-            <a:off x="1803638" y="4454260"/>
+            <a:off x="1673113" y="4461391"/>
             <a:ext cx="77899" cy="129540"/>
           </a:xfrm>
           <a:prstGeom prst="line">
             <a:avLst/>
           </a:prstGeom>
+          <a:ln>
+            <a:solidFill>
+              <a:srgbClr val="FF0000"/>
+            </a:solidFill>
+          </a:ln>
         </p:spPr>
         <p:style>
           <a:lnRef idx="2">
@@ -6490,7 +6451,7 @@
         </p:nvSpPr>
         <p:spPr>
           <a:xfrm>
-            <a:off x="1688197" y="4330630"/>
+            <a:off x="1594182" y="4273526"/>
             <a:ext cx="245580" cy="230832"/>
           </a:xfrm>
           <a:prstGeom prst="rect">
@@ -6506,7 +6467,11 @@
           <a:p>
             <a:pPr algn="ctr"/>
             <a:r>
-              <a:rPr lang="en-US" sz="900" dirty="0"/>
+              <a:rPr lang="en-US" sz="900" dirty="0">
+                <a:solidFill>
+                  <a:srgbClr val="FF0000"/>
+                </a:solidFill>
+              </a:rPr>
               <a:t>7</a:t>
             </a:r>
           </a:p>
@@ -7382,13 +7347,15 @@
               </a:ext>
             </a:extLst>
           </p:cNvPr>
-          <p:cNvCxnSpPr/>
+          <p:cNvCxnSpPr>
+            <a:cxnSpLocks/>
+          </p:cNvCxnSpPr>
           <p:nvPr/>
         </p:nvCxnSpPr>
         <p:spPr>
           <a:xfrm flipV="1">
             <a:off x="5804838" y="3309402"/>
-            <a:ext cx="0" cy="173037"/>
+            <a:ext cx="0" cy="532756"/>
           </a:xfrm>
           <a:prstGeom prst="straightConnector1">
             <a:avLst/>
@@ -10219,7 +10186,7 @@
         <p:spPr>
           <a:xfrm flipV="1">
             <a:off x="10822834" y="3193477"/>
-            <a:ext cx="0" cy="616523"/>
+            <a:ext cx="0" cy="960350"/>
           </a:xfrm>
           <a:prstGeom prst="straightConnector1">
             <a:avLst/>
@@ -10262,12 +10229,17 @@
         </p:nvCxnSpPr>
         <p:spPr>
           <a:xfrm flipH="1">
-            <a:off x="10772078" y="3608496"/>
-            <a:ext cx="107051" cy="69157"/>
+            <a:off x="10758657" y="3429000"/>
+            <a:ext cx="130253" cy="69156"/>
           </a:xfrm>
           <a:prstGeom prst="line">
             <a:avLst/>
           </a:prstGeom>
+          <a:ln>
+            <a:solidFill>
+              <a:srgbClr val="FF0000"/>
+            </a:solidFill>
+          </a:ln>
         </p:spPr>
         <p:style>
           <a:lnRef idx="2">
@@ -10301,7 +10273,7 @@
         <p:spPr>
           <a:xfrm flipV="1">
             <a:off x="9432653" y="4931909"/>
-            <a:ext cx="0" cy="318976"/>
+            <a:ext cx="0" cy="575268"/>
           </a:xfrm>
           <a:prstGeom prst="straightConnector1">
             <a:avLst/>
@@ -10350,6 +10322,11 @@
           <a:prstGeom prst="line">
             <a:avLst/>
           </a:prstGeom>
+          <a:ln>
+            <a:solidFill>
+              <a:srgbClr val="FF0000"/>
+            </a:solidFill>
+          </a:ln>
         </p:spPr>
         <p:style>
           <a:lnRef idx="2">
@@ -10661,13 +10638,15 @@
               </a:ext>
             </a:extLst>
           </p:cNvPr>
-          <p:cNvCxnSpPr/>
+          <p:cNvCxnSpPr>
+            <a:cxnSpLocks/>
+          </p:cNvCxnSpPr>
           <p:nvPr/>
         </p:nvCxnSpPr>
         <p:spPr>
           <a:xfrm flipV="1">
             <a:off x="8719883" y="2434882"/>
-            <a:ext cx="0" cy="167673"/>
+            <a:ext cx="0" cy="351899"/>
           </a:xfrm>
           <a:prstGeom prst="straightConnector1">
             <a:avLst/>
@@ -10694,6 +10673,2769 @@
           </a:fontRef>
         </p:style>
       </p:cxnSp>
+      <p:cxnSp>
+        <p:nvCxnSpPr>
+          <p:cNvPr id="224" name="Straight Connector 223">
+            <a:extLst>
+              <a:ext uri="{FF2B5EF4-FFF2-40B4-BE49-F238E27FC236}">
+                <a16:creationId xmlns:a16="http://schemas.microsoft.com/office/drawing/2014/main" id="{AE7FC533-C416-6EFB-8F89-18F3C1E9E933}"/>
+              </a:ext>
+            </a:extLst>
+          </p:cNvPr>
+          <p:cNvCxnSpPr>
+            <a:cxnSpLocks/>
+          </p:cNvCxnSpPr>
+          <p:nvPr/>
+        </p:nvCxnSpPr>
+        <p:spPr>
+          <a:xfrm>
+            <a:off x="3200400" y="3373241"/>
+            <a:ext cx="0" cy="254998"/>
+          </a:xfrm>
+          <a:prstGeom prst="line">
+            <a:avLst/>
+          </a:prstGeom>
+          <a:ln>
+            <a:solidFill>
+              <a:srgbClr val="FF0000"/>
+            </a:solidFill>
+          </a:ln>
+        </p:spPr>
+        <p:style>
+          <a:lnRef idx="2">
+            <a:schemeClr val="accent1"/>
+          </a:lnRef>
+          <a:fillRef idx="0">
+            <a:schemeClr val="accent1"/>
+          </a:fillRef>
+          <a:effectRef idx="1">
+            <a:schemeClr val="accent1"/>
+          </a:effectRef>
+          <a:fontRef idx="minor">
+            <a:schemeClr val="tx1"/>
+          </a:fontRef>
+        </p:style>
+      </p:cxnSp>
+      <p:sp>
+        <p:nvSpPr>
+          <p:cNvPr id="226" name="TextBox 225">
+            <a:extLst>
+              <a:ext uri="{FF2B5EF4-FFF2-40B4-BE49-F238E27FC236}">
+                <a16:creationId xmlns:a16="http://schemas.microsoft.com/office/drawing/2014/main" id="{E32F4DA9-CDC2-89B2-C566-78155F1B7775}"/>
+              </a:ext>
+            </a:extLst>
+          </p:cNvPr>
+          <p:cNvSpPr txBox="1"/>
+          <p:nvPr/>
+        </p:nvSpPr>
+        <p:spPr>
+          <a:xfrm>
+            <a:off x="3072930" y="3570138"/>
+            <a:ext cx="1149675" cy="230832"/>
+          </a:xfrm>
+          <a:prstGeom prst="rect">
+            <a:avLst/>
+          </a:prstGeom>
+          <a:noFill/>
+        </p:spPr>
+        <p:txBody>
+          <a:bodyPr wrap="none" rtlCol="0">
+            <a:spAutoFit/>
+          </a:bodyPr>
+          <a:lstStyle/>
+          <a:p>
+            <a:pPr algn="ctr"/>
+            <a:r>
+              <a:rPr lang="en-US" sz="900" dirty="0" err="1">
+                <a:solidFill>
+                  <a:srgbClr val="FF0000"/>
+                </a:solidFill>
+              </a:rPr>
+              <a:t>mem_wb_reg_write</a:t>
+            </a:r>
+            <a:endParaRPr lang="en-US" sz="900" dirty="0">
+              <a:solidFill>
+                <a:srgbClr val="FF0000"/>
+              </a:solidFill>
+            </a:endParaRPr>
+          </a:p>
+        </p:txBody>
+      </p:sp>
+      <p:sp>
+        <p:nvSpPr>
+          <p:cNvPr id="228" name="TextBox 227">
+            <a:extLst>
+              <a:ext uri="{FF2B5EF4-FFF2-40B4-BE49-F238E27FC236}">
+                <a16:creationId xmlns:a16="http://schemas.microsoft.com/office/drawing/2014/main" id="{6626D432-D275-430A-8CB9-56E2D8652EB5}"/>
+              </a:ext>
+            </a:extLst>
+          </p:cNvPr>
+          <p:cNvSpPr txBox="1"/>
+          <p:nvPr/>
+        </p:nvSpPr>
+        <p:spPr>
+          <a:xfrm>
+            <a:off x="5692679" y="3801368"/>
+            <a:ext cx="861134" cy="230832"/>
+          </a:xfrm>
+          <a:prstGeom prst="rect">
+            <a:avLst/>
+          </a:prstGeom>
+          <a:noFill/>
+        </p:spPr>
+        <p:txBody>
+          <a:bodyPr wrap="none" rtlCol="0">
+            <a:spAutoFit/>
+          </a:bodyPr>
+          <a:lstStyle/>
+          <a:p>
+            <a:pPr algn="ctr"/>
+            <a:r>
+              <a:rPr lang="en-US" sz="900" dirty="0" err="1">
+                <a:solidFill>
+                  <a:srgbClr val="FF0000"/>
+                </a:solidFill>
+              </a:rPr>
+              <a:t>id_ex_alu_src</a:t>
+            </a:r>
+            <a:endParaRPr lang="en-US" sz="900" dirty="0">
+              <a:solidFill>
+                <a:srgbClr val="FF0000"/>
+              </a:solidFill>
+            </a:endParaRPr>
+          </a:p>
+        </p:txBody>
+      </p:sp>
+      <p:sp>
+        <p:nvSpPr>
+          <p:cNvPr id="233" name="TextBox 232">
+            <a:extLst>
+              <a:ext uri="{FF2B5EF4-FFF2-40B4-BE49-F238E27FC236}">
+                <a16:creationId xmlns:a16="http://schemas.microsoft.com/office/drawing/2014/main" id="{435CF826-9638-FDFE-32B4-990DE0DDB3F7}"/>
+              </a:ext>
+            </a:extLst>
+          </p:cNvPr>
+          <p:cNvSpPr txBox="1"/>
+          <p:nvPr/>
+        </p:nvSpPr>
+        <p:spPr>
+          <a:xfrm>
+            <a:off x="6166305" y="3387742"/>
+            <a:ext cx="830677" cy="230832"/>
+          </a:xfrm>
+          <a:prstGeom prst="rect">
+            <a:avLst/>
+          </a:prstGeom>
+          <a:noFill/>
+        </p:spPr>
+        <p:txBody>
+          <a:bodyPr wrap="none" rtlCol="0">
+            <a:spAutoFit/>
+          </a:bodyPr>
+          <a:lstStyle/>
+          <a:p>
+            <a:pPr algn="ctr"/>
+            <a:r>
+              <a:rPr lang="en-US" sz="900" dirty="0" err="1">
+                <a:solidFill>
+                  <a:srgbClr val="FF0000"/>
+                </a:solidFill>
+              </a:rPr>
+              <a:t>id_ex_alu_op</a:t>
+            </a:r>
+            <a:endParaRPr lang="en-US" sz="900" dirty="0">
+              <a:solidFill>
+                <a:srgbClr val="FF0000"/>
+              </a:solidFill>
+            </a:endParaRPr>
+          </a:p>
+        </p:txBody>
+      </p:sp>
+      <p:sp>
+        <p:nvSpPr>
+          <p:cNvPr id="234" name="TextBox 233">
+            <a:extLst>
+              <a:ext uri="{FF2B5EF4-FFF2-40B4-BE49-F238E27FC236}">
+                <a16:creationId xmlns:a16="http://schemas.microsoft.com/office/drawing/2014/main" id="{480E96B6-4082-54ED-8A12-2A2D8ED66F3F}"/>
+              </a:ext>
+            </a:extLst>
+          </p:cNvPr>
+          <p:cNvSpPr txBox="1"/>
+          <p:nvPr/>
+        </p:nvSpPr>
+        <p:spPr>
+          <a:xfrm>
+            <a:off x="7526303" y="2585983"/>
+            <a:ext cx="1085554" cy="215444"/>
+          </a:xfrm>
+          <a:prstGeom prst="rect">
+            <a:avLst/>
+          </a:prstGeom>
+          <a:noFill/>
+        </p:spPr>
+        <p:txBody>
+          <a:bodyPr wrap="none" rtlCol="0">
+            <a:spAutoFit/>
+          </a:bodyPr>
+          <a:lstStyle/>
+          <a:p>
+            <a:pPr algn="ctr"/>
+            <a:r>
+              <a:rPr lang="en-US" sz="800" dirty="0" err="1">
+                <a:solidFill>
+                  <a:srgbClr val="FF0000"/>
+                </a:solidFill>
+              </a:rPr>
+              <a:t>ex_mem_mem_read</a:t>
+            </a:r>
+            <a:endParaRPr lang="en-US" sz="800" dirty="0">
+              <a:solidFill>
+                <a:srgbClr val="FF0000"/>
+              </a:solidFill>
+            </a:endParaRPr>
+          </a:p>
+        </p:txBody>
+      </p:sp>
+      <p:sp>
+        <p:nvSpPr>
+          <p:cNvPr id="237" name="TextBox 236">
+            <a:extLst>
+              <a:ext uri="{FF2B5EF4-FFF2-40B4-BE49-F238E27FC236}">
+                <a16:creationId xmlns:a16="http://schemas.microsoft.com/office/drawing/2014/main" id="{8569D8E0-B04D-6193-3F53-B9F417ADBA0C}"/>
+              </a:ext>
+            </a:extLst>
+          </p:cNvPr>
+          <p:cNvSpPr txBox="1"/>
+          <p:nvPr/>
+        </p:nvSpPr>
+        <p:spPr>
+          <a:xfrm>
+            <a:off x="8395108" y="2744225"/>
+            <a:ext cx="1104790" cy="215444"/>
+          </a:xfrm>
+          <a:prstGeom prst="rect">
+            <a:avLst/>
+          </a:prstGeom>
+          <a:noFill/>
+        </p:spPr>
+        <p:txBody>
+          <a:bodyPr wrap="none" rtlCol="0">
+            <a:spAutoFit/>
+          </a:bodyPr>
+          <a:lstStyle/>
+          <a:p>
+            <a:pPr algn="ctr"/>
+            <a:r>
+              <a:rPr lang="en-US" sz="800" dirty="0" err="1">
+                <a:solidFill>
+                  <a:srgbClr val="FF0000"/>
+                </a:solidFill>
+              </a:rPr>
+              <a:t>ex_mem_mem_write</a:t>
+            </a:r>
+            <a:endParaRPr lang="en-US" sz="800" dirty="0">
+              <a:solidFill>
+                <a:srgbClr val="FF0000"/>
+              </a:solidFill>
+            </a:endParaRPr>
+          </a:p>
+        </p:txBody>
+      </p:sp>
+      <p:sp>
+        <p:nvSpPr>
+          <p:cNvPr id="242" name="TextBox 241">
+            <a:extLst>
+              <a:ext uri="{FF2B5EF4-FFF2-40B4-BE49-F238E27FC236}">
+                <a16:creationId xmlns:a16="http://schemas.microsoft.com/office/drawing/2014/main" id="{FA1E676F-F9C8-0D80-0A20-BE3817118081}"/>
+              </a:ext>
+            </a:extLst>
+          </p:cNvPr>
+          <p:cNvSpPr txBox="1"/>
+          <p:nvPr/>
+        </p:nvSpPr>
+        <p:spPr>
+          <a:xfrm>
+            <a:off x="8646726" y="3935465"/>
+            <a:ext cx="837088" cy="215444"/>
+          </a:xfrm>
+          <a:prstGeom prst="rect">
+            <a:avLst/>
+          </a:prstGeom>
+          <a:noFill/>
+        </p:spPr>
+        <p:txBody>
+          <a:bodyPr wrap="none" rtlCol="0">
+            <a:spAutoFit/>
+          </a:bodyPr>
+          <a:lstStyle/>
+          <a:p>
+            <a:pPr algn="ctr"/>
+            <a:r>
+              <a:rPr lang="en-US" sz="800" dirty="0" err="1">
+                <a:solidFill>
+                  <a:srgbClr val="FF0000"/>
+                </a:solidFill>
+              </a:rPr>
+              <a:t>not_equal_flag</a:t>
+            </a:r>
+            <a:endParaRPr lang="en-US" sz="800" dirty="0">
+              <a:solidFill>
+                <a:srgbClr val="FF0000"/>
+              </a:solidFill>
+            </a:endParaRPr>
+          </a:p>
+        </p:txBody>
+      </p:sp>
+      <p:sp>
+        <p:nvSpPr>
+          <p:cNvPr id="244" name="TextBox 243">
+            <a:extLst>
+              <a:ext uri="{FF2B5EF4-FFF2-40B4-BE49-F238E27FC236}">
+                <a16:creationId xmlns:a16="http://schemas.microsoft.com/office/drawing/2014/main" id="{2BF5705F-44C0-8CBF-AD47-D3F4CDEDDAB4}"/>
+              </a:ext>
+            </a:extLst>
+          </p:cNvPr>
+          <p:cNvSpPr txBox="1"/>
+          <p:nvPr/>
+        </p:nvSpPr>
+        <p:spPr>
+          <a:xfrm>
+            <a:off x="9179605" y="5029996"/>
+            <a:ext cx="245580" cy="230832"/>
+          </a:xfrm>
+          <a:prstGeom prst="rect">
+            <a:avLst/>
+          </a:prstGeom>
+          <a:noFill/>
+        </p:spPr>
+        <p:txBody>
+          <a:bodyPr wrap="none" rtlCol="0">
+            <a:spAutoFit/>
+          </a:bodyPr>
+          <a:lstStyle/>
+          <a:p>
+            <a:pPr algn="ctr"/>
+            <a:r>
+              <a:rPr lang="en-US" sz="900" dirty="0">
+                <a:solidFill>
+                  <a:srgbClr val="FF0000"/>
+                </a:solidFill>
+              </a:rPr>
+              <a:t>2</a:t>
+            </a:r>
+          </a:p>
+        </p:txBody>
+      </p:sp>
+      <p:cxnSp>
+        <p:nvCxnSpPr>
+          <p:cNvPr id="246" name="Straight Connector 245">
+            <a:extLst>
+              <a:ext uri="{FF2B5EF4-FFF2-40B4-BE49-F238E27FC236}">
+                <a16:creationId xmlns:a16="http://schemas.microsoft.com/office/drawing/2014/main" id="{95AB021B-69D6-F75E-5C3A-19D4613B0610}"/>
+              </a:ext>
+            </a:extLst>
+          </p:cNvPr>
+          <p:cNvCxnSpPr>
+            <a:cxnSpLocks/>
+          </p:cNvCxnSpPr>
+          <p:nvPr/>
+        </p:nvCxnSpPr>
+        <p:spPr>
+          <a:xfrm flipH="1">
+            <a:off x="9243329" y="5339755"/>
+            <a:ext cx="177508" cy="0"/>
+          </a:xfrm>
+          <a:prstGeom prst="line">
+            <a:avLst/>
+          </a:prstGeom>
+          <a:ln>
+            <a:solidFill>
+              <a:srgbClr val="FF0000"/>
+            </a:solidFill>
+          </a:ln>
+        </p:spPr>
+        <p:style>
+          <a:lnRef idx="2">
+            <a:schemeClr val="accent1"/>
+          </a:lnRef>
+          <a:fillRef idx="0">
+            <a:schemeClr val="accent1"/>
+          </a:fillRef>
+          <a:effectRef idx="1">
+            <a:schemeClr val="accent1"/>
+          </a:effectRef>
+          <a:fontRef idx="minor">
+            <a:schemeClr val="tx1"/>
+          </a:fontRef>
+        </p:style>
+      </p:cxnSp>
+      <p:cxnSp>
+        <p:nvCxnSpPr>
+          <p:cNvPr id="252" name="Straight Connector 251">
+            <a:extLst>
+              <a:ext uri="{FF2B5EF4-FFF2-40B4-BE49-F238E27FC236}">
+                <a16:creationId xmlns:a16="http://schemas.microsoft.com/office/drawing/2014/main" id="{E34357A9-24B8-40F1-2DB5-847DFFFADEE0}"/>
+              </a:ext>
+            </a:extLst>
+          </p:cNvPr>
+          <p:cNvCxnSpPr>
+            <a:cxnSpLocks/>
+          </p:cNvCxnSpPr>
+          <p:nvPr/>
+        </p:nvCxnSpPr>
+        <p:spPr>
+          <a:xfrm flipH="1">
+            <a:off x="9248862" y="5502787"/>
+            <a:ext cx="197141" cy="0"/>
+          </a:xfrm>
+          <a:prstGeom prst="line">
+            <a:avLst/>
+          </a:prstGeom>
+          <a:ln>
+            <a:solidFill>
+              <a:srgbClr val="FF0000"/>
+            </a:solidFill>
+          </a:ln>
+        </p:spPr>
+        <p:style>
+          <a:lnRef idx="2">
+            <a:schemeClr val="accent1"/>
+          </a:lnRef>
+          <a:fillRef idx="0">
+            <a:schemeClr val="accent1"/>
+          </a:fillRef>
+          <a:effectRef idx="1">
+            <a:schemeClr val="accent1"/>
+          </a:effectRef>
+          <a:fontRef idx="minor">
+            <a:schemeClr val="tx1"/>
+          </a:fontRef>
+        </p:style>
+      </p:cxnSp>
+      <p:sp>
+        <p:nvSpPr>
+          <p:cNvPr id="36" name="TextBox 35">
+            <a:extLst>
+              <a:ext uri="{FF2B5EF4-FFF2-40B4-BE49-F238E27FC236}">
+                <a16:creationId xmlns:a16="http://schemas.microsoft.com/office/drawing/2014/main" id="{41E42D59-0487-12D8-2B9E-F9ECA470F5D1}"/>
+              </a:ext>
+            </a:extLst>
+          </p:cNvPr>
+          <p:cNvSpPr txBox="1"/>
+          <p:nvPr/>
+        </p:nvSpPr>
+        <p:spPr>
+          <a:xfrm>
+            <a:off x="8386303" y="5228090"/>
+            <a:ext cx="920445" cy="215444"/>
+          </a:xfrm>
+          <a:prstGeom prst="rect">
+            <a:avLst/>
+          </a:prstGeom>
+          <a:noFill/>
+        </p:spPr>
+        <p:txBody>
+          <a:bodyPr wrap="none" rtlCol="0">
+            <a:spAutoFit/>
+          </a:bodyPr>
+          <a:lstStyle/>
+          <a:p>
+            <a:pPr algn="ctr"/>
+            <a:r>
+              <a:rPr lang="en-US" sz="800" dirty="0" err="1">
+                <a:solidFill>
+                  <a:srgbClr val="FF0000"/>
+                </a:solidFill>
+              </a:rPr>
+              <a:t>ex_mem_branch</a:t>
+            </a:r>
+            <a:endParaRPr lang="en-US" sz="800" dirty="0">
+              <a:solidFill>
+                <a:srgbClr val="FF0000"/>
+              </a:solidFill>
+            </a:endParaRPr>
+          </a:p>
+        </p:txBody>
+      </p:sp>
+      <p:sp>
+        <p:nvSpPr>
+          <p:cNvPr id="37" name="TextBox 36">
+            <a:extLst>
+              <a:ext uri="{FF2B5EF4-FFF2-40B4-BE49-F238E27FC236}">
+                <a16:creationId xmlns:a16="http://schemas.microsoft.com/office/drawing/2014/main" id="{EE2B68C8-7AA5-FFD6-492F-FBF9E16922D7}"/>
+              </a:ext>
+            </a:extLst>
+          </p:cNvPr>
+          <p:cNvSpPr txBox="1"/>
+          <p:nvPr/>
+        </p:nvSpPr>
+        <p:spPr>
+          <a:xfrm>
+            <a:off x="8437588" y="5377092"/>
+            <a:ext cx="835485" cy="215444"/>
+          </a:xfrm>
+          <a:prstGeom prst="rect">
+            <a:avLst/>
+          </a:prstGeom>
+          <a:noFill/>
+        </p:spPr>
+        <p:txBody>
+          <a:bodyPr wrap="none" rtlCol="0">
+            <a:spAutoFit/>
+          </a:bodyPr>
+          <a:lstStyle/>
+          <a:p>
+            <a:pPr algn="ctr"/>
+            <a:r>
+              <a:rPr lang="en-US" sz="800" dirty="0" err="1">
+                <a:solidFill>
+                  <a:srgbClr val="FF0000"/>
+                </a:solidFill>
+              </a:rPr>
+              <a:t>ex_mem_jump</a:t>
+            </a:r>
+            <a:endParaRPr lang="en-US" sz="800" dirty="0">
+              <a:solidFill>
+                <a:srgbClr val="FF0000"/>
+              </a:solidFill>
+            </a:endParaRPr>
+          </a:p>
+        </p:txBody>
+      </p:sp>
+      <p:cxnSp>
+        <p:nvCxnSpPr>
+          <p:cNvPr id="256" name="Straight Arrow Connector 255">
+            <a:extLst>
+              <a:ext uri="{FF2B5EF4-FFF2-40B4-BE49-F238E27FC236}">
+                <a16:creationId xmlns:a16="http://schemas.microsoft.com/office/drawing/2014/main" id="{F615D6A7-9797-CA91-9080-9AA6D425649A}"/>
+              </a:ext>
+            </a:extLst>
+          </p:cNvPr>
+          <p:cNvCxnSpPr>
+            <a:cxnSpLocks/>
+          </p:cNvCxnSpPr>
+          <p:nvPr/>
+        </p:nvCxnSpPr>
+        <p:spPr>
+          <a:xfrm>
+            <a:off x="10612073" y="3189791"/>
+            <a:ext cx="117446" cy="0"/>
+          </a:xfrm>
+          <a:prstGeom prst="straightConnector1">
+            <a:avLst/>
+          </a:prstGeom>
+          <a:ln>
+            <a:solidFill>
+              <a:srgbClr val="FF0000"/>
+            </a:solidFill>
+            <a:tailEnd type="triangle"/>
+          </a:ln>
+        </p:spPr>
+        <p:style>
+          <a:lnRef idx="2">
+            <a:schemeClr val="accent1"/>
+          </a:lnRef>
+          <a:fillRef idx="0">
+            <a:schemeClr val="accent1"/>
+          </a:fillRef>
+          <a:effectRef idx="1">
+            <a:schemeClr val="accent1"/>
+          </a:effectRef>
+          <a:fontRef idx="minor">
+            <a:schemeClr val="tx1"/>
+          </a:fontRef>
+        </p:style>
+      </p:cxnSp>
+      <p:sp>
+        <p:nvSpPr>
+          <p:cNvPr id="265" name="TextBox 264">
+            <a:extLst>
+              <a:ext uri="{FF2B5EF4-FFF2-40B4-BE49-F238E27FC236}">
+                <a16:creationId xmlns:a16="http://schemas.microsoft.com/office/drawing/2014/main" id="{D725BC4B-E633-D2F7-E248-FB75B8CCBFFF}"/>
+              </a:ext>
+            </a:extLst>
+          </p:cNvPr>
+          <p:cNvSpPr txBox="1"/>
+          <p:nvPr/>
+        </p:nvSpPr>
+        <p:spPr>
+          <a:xfrm>
+            <a:off x="9906000" y="3065693"/>
+            <a:ext cx="777777" cy="230832"/>
+          </a:xfrm>
+          <a:prstGeom prst="rect">
+            <a:avLst/>
+          </a:prstGeom>
+          <a:noFill/>
+        </p:spPr>
+        <p:txBody>
+          <a:bodyPr wrap="none" rtlCol="0">
+            <a:spAutoFit/>
+          </a:bodyPr>
+          <a:lstStyle/>
+          <a:p>
+            <a:pPr algn="r"/>
+            <a:r>
+              <a:rPr lang="en-US" sz="900" dirty="0">
+                <a:solidFill>
+                  <a:srgbClr val="FF0000"/>
+                </a:solidFill>
+              </a:rPr>
+              <a:t>”00000000”</a:t>
+            </a:r>
+          </a:p>
+        </p:txBody>
+      </p:sp>
+      <p:sp>
+        <p:nvSpPr>
+          <p:cNvPr id="266" name="TextBox 265">
+            <a:extLst>
+              <a:ext uri="{FF2B5EF4-FFF2-40B4-BE49-F238E27FC236}">
+                <a16:creationId xmlns:a16="http://schemas.microsoft.com/office/drawing/2014/main" id="{1CFB3B0E-C956-0167-323F-B1AECAAC77B1}"/>
+              </a:ext>
+            </a:extLst>
+          </p:cNvPr>
+          <p:cNvSpPr txBox="1"/>
+          <p:nvPr/>
+        </p:nvSpPr>
+        <p:spPr>
+          <a:xfrm>
+            <a:off x="10566603" y="3358634"/>
+            <a:ext cx="245580" cy="230832"/>
+          </a:xfrm>
+          <a:prstGeom prst="rect">
+            <a:avLst/>
+          </a:prstGeom>
+          <a:noFill/>
+        </p:spPr>
+        <p:txBody>
+          <a:bodyPr wrap="none" rtlCol="0">
+            <a:spAutoFit/>
+          </a:bodyPr>
+          <a:lstStyle/>
+          <a:p>
+            <a:pPr algn="ctr"/>
+            <a:r>
+              <a:rPr lang="en-US" sz="900" dirty="0">
+                <a:solidFill>
+                  <a:srgbClr val="FF0000"/>
+                </a:solidFill>
+              </a:rPr>
+              <a:t>3</a:t>
+            </a:r>
+          </a:p>
+        </p:txBody>
+      </p:sp>
+      <p:cxnSp>
+        <p:nvCxnSpPr>
+          <p:cNvPr id="268" name="Straight Connector 267">
+            <a:extLst>
+              <a:ext uri="{FF2B5EF4-FFF2-40B4-BE49-F238E27FC236}">
+                <a16:creationId xmlns:a16="http://schemas.microsoft.com/office/drawing/2014/main" id="{0B2C3EF2-AA53-F608-D2EC-D4C3148FDF7E}"/>
+              </a:ext>
+            </a:extLst>
+          </p:cNvPr>
+          <p:cNvCxnSpPr>
+            <a:cxnSpLocks/>
+          </p:cNvCxnSpPr>
+          <p:nvPr/>
+        </p:nvCxnSpPr>
+        <p:spPr>
+          <a:xfrm flipH="1">
+            <a:off x="10809215" y="3734077"/>
+            <a:ext cx="206928" cy="0"/>
+          </a:xfrm>
+          <a:prstGeom prst="line">
+            <a:avLst/>
+          </a:prstGeom>
+          <a:ln>
+            <a:solidFill>
+              <a:srgbClr val="FF0000"/>
+            </a:solidFill>
+          </a:ln>
+        </p:spPr>
+        <p:style>
+          <a:lnRef idx="2">
+            <a:schemeClr val="accent1"/>
+          </a:lnRef>
+          <a:fillRef idx="0">
+            <a:schemeClr val="accent1"/>
+          </a:fillRef>
+          <a:effectRef idx="1">
+            <a:schemeClr val="accent1"/>
+          </a:effectRef>
+          <a:fontRef idx="minor">
+            <a:schemeClr val="tx1"/>
+          </a:fontRef>
+        </p:style>
+      </p:cxnSp>
+      <p:sp>
+        <p:nvSpPr>
+          <p:cNvPr id="270" name="TextBox 269">
+            <a:extLst>
+              <a:ext uri="{FF2B5EF4-FFF2-40B4-BE49-F238E27FC236}">
+                <a16:creationId xmlns:a16="http://schemas.microsoft.com/office/drawing/2014/main" id="{6ACC3390-4CB9-508E-5C3D-388F3562B716}"/>
+              </a:ext>
+            </a:extLst>
+          </p:cNvPr>
+          <p:cNvSpPr txBox="1"/>
+          <p:nvPr/>
+        </p:nvSpPr>
+        <p:spPr>
+          <a:xfrm>
+            <a:off x="10969389" y="3626714"/>
+            <a:ext cx="1117614" cy="215444"/>
+          </a:xfrm>
+          <a:prstGeom prst="rect">
+            <a:avLst/>
+          </a:prstGeom>
+          <a:noFill/>
+        </p:spPr>
+        <p:txBody>
+          <a:bodyPr wrap="none" rtlCol="0">
+            <a:spAutoFit/>
+          </a:bodyPr>
+          <a:lstStyle/>
+          <a:p>
+            <a:pPr algn="ctr"/>
+            <a:r>
+              <a:rPr lang="en-US" sz="800" dirty="0" err="1">
+                <a:solidFill>
+                  <a:srgbClr val="FF0000"/>
+                </a:solidFill>
+              </a:rPr>
+              <a:t>mem_wb_mem_read</a:t>
+            </a:r>
+            <a:endParaRPr lang="en-US" sz="800" dirty="0">
+              <a:solidFill>
+                <a:srgbClr val="FF0000"/>
+              </a:solidFill>
+            </a:endParaRPr>
+          </a:p>
+        </p:txBody>
+      </p:sp>
+      <p:cxnSp>
+        <p:nvCxnSpPr>
+          <p:cNvPr id="272" name="Straight Connector 271">
+            <a:extLst>
+              <a:ext uri="{FF2B5EF4-FFF2-40B4-BE49-F238E27FC236}">
+                <a16:creationId xmlns:a16="http://schemas.microsoft.com/office/drawing/2014/main" id="{810103FE-1702-DD83-C716-3A876D276465}"/>
+              </a:ext>
+            </a:extLst>
+          </p:cNvPr>
+          <p:cNvCxnSpPr>
+            <a:cxnSpLocks/>
+          </p:cNvCxnSpPr>
+          <p:nvPr/>
+        </p:nvCxnSpPr>
+        <p:spPr>
+          <a:xfrm flipH="1">
+            <a:off x="10835781" y="3953589"/>
+            <a:ext cx="206928" cy="0"/>
+          </a:xfrm>
+          <a:prstGeom prst="line">
+            <a:avLst/>
+          </a:prstGeom>
+          <a:ln>
+            <a:solidFill>
+              <a:srgbClr val="FF0000"/>
+            </a:solidFill>
+          </a:ln>
+        </p:spPr>
+        <p:style>
+          <a:lnRef idx="2">
+            <a:schemeClr val="accent1"/>
+          </a:lnRef>
+          <a:fillRef idx="0">
+            <a:schemeClr val="accent1"/>
+          </a:fillRef>
+          <a:effectRef idx="1">
+            <a:schemeClr val="accent1"/>
+          </a:effectRef>
+          <a:fontRef idx="minor">
+            <a:schemeClr val="tx1"/>
+          </a:fontRef>
+        </p:style>
+      </p:cxnSp>
+      <p:cxnSp>
+        <p:nvCxnSpPr>
+          <p:cNvPr id="273" name="Straight Connector 272">
+            <a:extLst>
+              <a:ext uri="{FF2B5EF4-FFF2-40B4-BE49-F238E27FC236}">
+                <a16:creationId xmlns:a16="http://schemas.microsoft.com/office/drawing/2014/main" id="{CD6056BE-727C-5DD4-EED5-654EE621DAC7}"/>
+              </a:ext>
+            </a:extLst>
+          </p:cNvPr>
+          <p:cNvCxnSpPr>
+            <a:cxnSpLocks/>
+          </p:cNvCxnSpPr>
+          <p:nvPr/>
+        </p:nvCxnSpPr>
+        <p:spPr>
+          <a:xfrm flipH="1">
+            <a:off x="10832984" y="4153827"/>
+            <a:ext cx="206928" cy="0"/>
+          </a:xfrm>
+          <a:prstGeom prst="line">
+            <a:avLst/>
+          </a:prstGeom>
+          <a:ln>
+            <a:solidFill>
+              <a:srgbClr val="FF0000"/>
+            </a:solidFill>
+          </a:ln>
+        </p:spPr>
+        <p:style>
+          <a:lnRef idx="2">
+            <a:schemeClr val="accent1"/>
+          </a:lnRef>
+          <a:fillRef idx="0">
+            <a:schemeClr val="accent1"/>
+          </a:fillRef>
+          <a:effectRef idx="1">
+            <a:schemeClr val="accent1"/>
+          </a:effectRef>
+          <a:fontRef idx="minor">
+            <a:schemeClr val="tx1"/>
+          </a:fontRef>
+        </p:style>
+      </p:cxnSp>
+      <p:sp>
+        <p:nvSpPr>
+          <p:cNvPr id="274" name="TextBox 273">
+            <a:extLst>
+              <a:ext uri="{FF2B5EF4-FFF2-40B4-BE49-F238E27FC236}">
+                <a16:creationId xmlns:a16="http://schemas.microsoft.com/office/drawing/2014/main" id="{F4B11E00-9133-F01E-4878-7962B13990A2}"/>
+              </a:ext>
+            </a:extLst>
+          </p:cNvPr>
+          <p:cNvSpPr txBox="1"/>
+          <p:nvPr/>
+        </p:nvSpPr>
+        <p:spPr>
+          <a:xfrm>
+            <a:off x="10985418" y="3842158"/>
+            <a:ext cx="1085555" cy="215444"/>
+          </a:xfrm>
+          <a:prstGeom prst="rect">
+            <a:avLst/>
+          </a:prstGeom>
+          <a:noFill/>
+        </p:spPr>
+        <p:txBody>
+          <a:bodyPr wrap="none" rtlCol="0">
+            <a:spAutoFit/>
+          </a:bodyPr>
+          <a:lstStyle/>
+          <a:p>
+            <a:pPr algn="ctr"/>
+            <a:r>
+              <a:rPr lang="en-US" sz="800" dirty="0" err="1">
+                <a:solidFill>
+                  <a:srgbClr val="FF0000"/>
+                </a:solidFill>
+              </a:rPr>
+              <a:t>mem_wb_load_addr</a:t>
+            </a:r>
+            <a:endParaRPr lang="en-US" sz="800" dirty="0">
+              <a:solidFill>
+                <a:srgbClr val="FF0000"/>
+              </a:solidFill>
+            </a:endParaRPr>
+          </a:p>
+        </p:txBody>
+      </p:sp>
+      <p:sp>
+        <p:nvSpPr>
+          <p:cNvPr id="275" name="TextBox 274">
+            <a:extLst>
+              <a:ext uri="{FF2B5EF4-FFF2-40B4-BE49-F238E27FC236}">
+                <a16:creationId xmlns:a16="http://schemas.microsoft.com/office/drawing/2014/main" id="{99FF803E-1412-517B-383F-D80D73EBBC57}"/>
+              </a:ext>
+            </a:extLst>
+          </p:cNvPr>
+          <p:cNvSpPr txBox="1"/>
+          <p:nvPr/>
+        </p:nvSpPr>
+        <p:spPr>
+          <a:xfrm>
+            <a:off x="11006257" y="4038496"/>
+            <a:ext cx="1043876" cy="215444"/>
+          </a:xfrm>
+          <a:prstGeom prst="rect">
+            <a:avLst/>
+          </a:prstGeom>
+          <a:noFill/>
+        </p:spPr>
+        <p:txBody>
+          <a:bodyPr wrap="none" rtlCol="0">
+            <a:spAutoFit/>
+          </a:bodyPr>
+          <a:lstStyle/>
+          <a:p>
+            <a:pPr algn="ctr"/>
+            <a:r>
+              <a:rPr lang="en-US" sz="800" dirty="0" err="1">
+                <a:solidFill>
+                  <a:srgbClr val="FF0000"/>
+                </a:solidFill>
+              </a:rPr>
+              <a:t>mem_wb_reg_write</a:t>
+            </a:r>
+            <a:endParaRPr lang="en-US" sz="800" dirty="0">
+              <a:solidFill>
+                <a:srgbClr val="FF0000"/>
+              </a:solidFill>
+            </a:endParaRPr>
+          </a:p>
+        </p:txBody>
+      </p:sp>
+      <p:sp>
+        <p:nvSpPr>
+          <p:cNvPr id="276" name="TextBox 275">
+            <a:extLst>
+              <a:ext uri="{FF2B5EF4-FFF2-40B4-BE49-F238E27FC236}">
+                <a16:creationId xmlns:a16="http://schemas.microsoft.com/office/drawing/2014/main" id="{4A49E503-28CB-5107-0166-F3EA210E6430}"/>
+              </a:ext>
+            </a:extLst>
+          </p:cNvPr>
+          <p:cNvSpPr txBox="1"/>
+          <p:nvPr/>
+        </p:nvSpPr>
+        <p:spPr>
+          <a:xfrm>
+            <a:off x="11074696" y="2232570"/>
+            <a:ext cx="562976" cy="215444"/>
+          </a:xfrm>
+          <a:prstGeom prst="rect">
+            <a:avLst/>
+          </a:prstGeom>
+          <a:noFill/>
+        </p:spPr>
+        <p:txBody>
+          <a:bodyPr wrap="none" rtlCol="0">
+            <a:spAutoFit/>
+          </a:bodyPr>
+          <a:lstStyle/>
+          <a:p>
+            <a:pPr algn="ctr"/>
+            <a:r>
+              <a:rPr lang="en-US" sz="800" dirty="0" err="1">
+                <a:solidFill>
+                  <a:schemeClr val="accent1"/>
+                </a:solidFill>
+              </a:rPr>
+              <a:t>wb_data</a:t>
+            </a:r>
+            <a:endParaRPr lang="en-US" sz="800" dirty="0">
+              <a:solidFill>
+                <a:schemeClr val="accent1"/>
+              </a:solidFill>
+            </a:endParaRPr>
+          </a:p>
+        </p:txBody>
+      </p:sp>
+      <p:cxnSp>
+        <p:nvCxnSpPr>
+          <p:cNvPr id="280" name="Straight Connector 279">
+            <a:extLst>
+              <a:ext uri="{FF2B5EF4-FFF2-40B4-BE49-F238E27FC236}">
+                <a16:creationId xmlns:a16="http://schemas.microsoft.com/office/drawing/2014/main" id="{1FC1ECF6-5D29-31CC-107B-15DB9CBAC411}"/>
+              </a:ext>
+            </a:extLst>
+          </p:cNvPr>
+          <p:cNvCxnSpPr>
+            <a:cxnSpLocks/>
+          </p:cNvCxnSpPr>
+          <p:nvPr/>
+        </p:nvCxnSpPr>
+        <p:spPr>
+          <a:xfrm>
+            <a:off x="1620711" y="4518460"/>
+            <a:ext cx="229139" cy="7701"/>
+          </a:xfrm>
+          <a:prstGeom prst="line">
+            <a:avLst/>
+          </a:prstGeom>
+          <a:ln>
+            <a:solidFill>
+              <a:srgbClr val="FF0000"/>
+            </a:solidFill>
+          </a:ln>
+        </p:spPr>
+        <p:style>
+          <a:lnRef idx="2">
+            <a:schemeClr val="accent1"/>
+          </a:lnRef>
+          <a:fillRef idx="0">
+            <a:schemeClr val="accent1"/>
+          </a:fillRef>
+          <a:effectRef idx="1">
+            <a:schemeClr val="accent1"/>
+          </a:effectRef>
+          <a:fontRef idx="minor">
+            <a:schemeClr val="tx1"/>
+          </a:fontRef>
+        </p:style>
+      </p:cxnSp>
+      <p:cxnSp>
+        <p:nvCxnSpPr>
+          <p:cNvPr id="282" name="Straight Connector 281">
+            <a:extLst>
+              <a:ext uri="{FF2B5EF4-FFF2-40B4-BE49-F238E27FC236}">
+                <a16:creationId xmlns:a16="http://schemas.microsoft.com/office/drawing/2014/main" id="{66396113-87F2-7CCA-C042-BF4DD79A9946}"/>
+              </a:ext>
+            </a:extLst>
+          </p:cNvPr>
+          <p:cNvCxnSpPr>
+            <a:cxnSpLocks/>
+          </p:cNvCxnSpPr>
+          <p:nvPr/>
+        </p:nvCxnSpPr>
+        <p:spPr>
+          <a:xfrm>
+            <a:off x="1858421" y="3874903"/>
+            <a:ext cx="0" cy="1018489"/>
+          </a:xfrm>
+          <a:prstGeom prst="line">
+            <a:avLst/>
+          </a:prstGeom>
+          <a:ln>
+            <a:solidFill>
+              <a:srgbClr val="FF0000"/>
+            </a:solidFill>
+          </a:ln>
+        </p:spPr>
+        <p:style>
+          <a:lnRef idx="2">
+            <a:schemeClr val="accent1"/>
+          </a:lnRef>
+          <a:fillRef idx="0">
+            <a:schemeClr val="accent1"/>
+          </a:fillRef>
+          <a:effectRef idx="1">
+            <a:schemeClr val="accent1"/>
+          </a:effectRef>
+          <a:fontRef idx="minor">
+            <a:schemeClr val="tx1"/>
+          </a:fontRef>
+        </p:style>
+      </p:cxnSp>
+      <p:cxnSp>
+        <p:nvCxnSpPr>
+          <p:cNvPr id="287" name="Straight Connector 286">
+            <a:extLst>
+              <a:ext uri="{FF2B5EF4-FFF2-40B4-BE49-F238E27FC236}">
+                <a16:creationId xmlns:a16="http://schemas.microsoft.com/office/drawing/2014/main" id="{0AB4C3F5-E0BE-DFA0-6FBF-0CCB15485604}"/>
+              </a:ext>
+            </a:extLst>
+          </p:cNvPr>
+          <p:cNvCxnSpPr>
+            <a:cxnSpLocks/>
+          </p:cNvCxnSpPr>
+          <p:nvPr/>
+        </p:nvCxnSpPr>
+        <p:spPr>
+          <a:xfrm>
+            <a:off x="1855431" y="3881267"/>
+            <a:ext cx="129357" cy="0"/>
+          </a:xfrm>
+          <a:prstGeom prst="line">
+            <a:avLst/>
+          </a:prstGeom>
+          <a:ln>
+            <a:solidFill>
+              <a:srgbClr val="FF0000"/>
+            </a:solidFill>
+          </a:ln>
+        </p:spPr>
+        <p:style>
+          <a:lnRef idx="2">
+            <a:schemeClr val="accent1"/>
+          </a:lnRef>
+          <a:fillRef idx="0">
+            <a:schemeClr val="accent1"/>
+          </a:fillRef>
+          <a:effectRef idx="1">
+            <a:schemeClr val="accent1"/>
+          </a:effectRef>
+          <a:fontRef idx="minor">
+            <a:schemeClr val="tx1"/>
+          </a:fontRef>
+        </p:style>
+      </p:cxnSp>
+      <p:cxnSp>
+        <p:nvCxnSpPr>
+          <p:cNvPr id="293" name="Straight Connector 292">
+            <a:extLst>
+              <a:ext uri="{FF2B5EF4-FFF2-40B4-BE49-F238E27FC236}">
+                <a16:creationId xmlns:a16="http://schemas.microsoft.com/office/drawing/2014/main" id="{0D24D4E8-3B6B-A910-6FE4-6371D2CA246E}"/>
+              </a:ext>
+            </a:extLst>
+          </p:cNvPr>
+          <p:cNvCxnSpPr>
+            <a:cxnSpLocks/>
+          </p:cNvCxnSpPr>
+          <p:nvPr/>
+        </p:nvCxnSpPr>
+        <p:spPr>
+          <a:xfrm>
+            <a:off x="1867611" y="4047113"/>
+            <a:ext cx="129357" cy="0"/>
+          </a:xfrm>
+          <a:prstGeom prst="line">
+            <a:avLst/>
+          </a:prstGeom>
+          <a:ln>
+            <a:solidFill>
+              <a:srgbClr val="FF0000"/>
+            </a:solidFill>
+          </a:ln>
+        </p:spPr>
+        <p:style>
+          <a:lnRef idx="2">
+            <a:schemeClr val="accent1"/>
+          </a:lnRef>
+          <a:fillRef idx="0">
+            <a:schemeClr val="accent1"/>
+          </a:fillRef>
+          <a:effectRef idx="1">
+            <a:schemeClr val="accent1"/>
+          </a:effectRef>
+          <a:fontRef idx="minor">
+            <a:schemeClr val="tx1"/>
+          </a:fontRef>
+        </p:style>
+      </p:cxnSp>
+      <p:cxnSp>
+        <p:nvCxnSpPr>
+          <p:cNvPr id="294" name="Straight Connector 293">
+            <a:extLst>
+              <a:ext uri="{FF2B5EF4-FFF2-40B4-BE49-F238E27FC236}">
+                <a16:creationId xmlns:a16="http://schemas.microsoft.com/office/drawing/2014/main" id="{E3B260C7-3B1D-AB9D-4D66-712BC911DC84}"/>
+              </a:ext>
+            </a:extLst>
+          </p:cNvPr>
+          <p:cNvCxnSpPr>
+            <a:cxnSpLocks/>
+          </p:cNvCxnSpPr>
+          <p:nvPr/>
+        </p:nvCxnSpPr>
+        <p:spPr>
+          <a:xfrm>
+            <a:off x="1867611" y="4215214"/>
+            <a:ext cx="129357" cy="0"/>
+          </a:xfrm>
+          <a:prstGeom prst="line">
+            <a:avLst/>
+          </a:prstGeom>
+          <a:ln>
+            <a:solidFill>
+              <a:srgbClr val="FF0000"/>
+            </a:solidFill>
+          </a:ln>
+        </p:spPr>
+        <p:style>
+          <a:lnRef idx="2">
+            <a:schemeClr val="accent1"/>
+          </a:lnRef>
+          <a:fillRef idx="0">
+            <a:schemeClr val="accent1"/>
+          </a:fillRef>
+          <a:effectRef idx="1">
+            <a:schemeClr val="accent1"/>
+          </a:effectRef>
+          <a:fontRef idx="minor">
+            <a:schemeClr val="tx1"/>
+          </a:fontRef>
+        </p:style>
+      </p:cxnSp>
+      <p:cxnSp>
+        <p:nvCxnSpPr>
+          <p:cNvPr id="295" name="Straight Connector 294">
+            <a:extLst>
+              <a:ext uri="{FF2B5EF4-FFF2-40B4-BE49-F238E27FC236}">
+                <a16:creationId xmlns:a16="http://schemas.microsoft.com/office/drawing/2014/main" id="{503C55A8-5830-13DE-CB7C-4BA8EEE7AEDA}"/>
+              </a:ext>
+            </a:extLst>
+          </p:cNvPr>
+          <p:cNvCxnSpPr>
+            <a:cxnSpLocks/>
+          </p:cNvCxnSpPr>
+          <p:nvPr/>
+        </p:nvCxnSpPr>
+        <p:spPr>
+          <a:xfrm>
+            <a:off x="1867611" y="4519030"/>
+            <a:ext cx="129357" cy="0"/>
+          </a:xfrm>
+          <a:prstGeom prst="line">
+            <a:avLst/>
+          </a:prstGeom>
+          <a:ln>
+            <a:solidFill>
+              <a:srgbClr val="FF0000"/>
+            </a:solidFill>
+          </a:ln>
+        </p:spPr>
+        <p:style>
+          <a:lnRef idx="2">
+            <a:schemeClr val="accent1"/>
+          </a:lnRef>
+          <a:fillRef idx="0">
+            <a:schemeClr val="accent1"/>
+          </a:fillRef>
+          <a:effectRef idx="1">
+            <a:schemeClr val="accent1"/>
+          </a:effectRef>
+          <a:fontRef idx="minor">
+            <a:schemeClr val="tx1"/>
+          </a:fontRef>
+        </p:style>
+      </p:cxnSp>
+      <p:cxnSp>
+        <p:nvCxnSpPr>
+          <p:cNvPr id="296" name="Straight Connector 295">
+            <a:extLst>
+              <a:ext uri="{FF2B5EF4-FFF2-40B4-BE49-F238E27FC236}">
+                <a16:creationId xmlns:a16="http://schemas.microsoft.com/office/drawing/2014/main" id="{3735E7EE-8983-C051-AFC7-B0B118C448AB}"/>
+              </a:ext>
+            </a:extLst>
+          </p:cNvPr>
+          <p:cNvCxnSpPr>
+            <a:cxnSpLocks/>
+          </p:cNvCxnSpPr>
+          <p:nvPr/>
+        </p:nvCxnSpPr>
+        <p:spPr>
+          <a:xfrm>
+            <a:off x="1855431" y="4717839"/>
+            <a:ext cx="129357" cy="0"/>
+          </a:xfrm>
+          <a:prstGeom prst="line">
+            <a:avLst/>
+          </a:prstGeom>
+          <a:ln>
+            <a:solidFill>
+              <a:srgbClr val="FF0000"/>
+            </a:solidFill>
+          </a:ln>
+        </p:spPr>
+        <p:style>
+          <a:lnRef idx="2">
+            <a:schemeClr val="accent1"/>
+          </a:lnRef>
+          <a:fillRef idx="0">
+            <a:schemeClr val="accent1"/>
+          </a:fillRef>
+          <a:effectRef idx="1">
+            <a:schemeClr val="accent1"/>
+          </a:effectRef>
+          <a:fontRef idx="minor">
+            <a:schemeClr val="tx1"/>
+          </a:fontRef>
+        </p:style>
+      </p:cxnSp>
+      <p:cxnSp>
+        <p:nvCxnSpPr>
+          <p:cNvPr id="298" name="Straight Connector 297">
+            <a:extLst>
+              <a:ext uri="{FF2B5EF4-FFF2-40B4-BE49-F238E27FC236}">
+                <a16:creationId xmlns:a16="http://schemas.microsoft.com/office/drawing/2014/main" id="{227246F4-84F3-6D73-F407-402327EE2005}"/>
+              </a:ext>
+            </a:extLst>
+          </p:cNvPr>
+          <p:cNvCxnSpPr>
+            <a:cxnSpLocks/>
+          </p:cNvCxnSpPr>
+          <p:nvPr/>
+        </p:nvCxnSpPr>
+        <p:spPr>
+          <a:xfrm>
+            <a:off x="1867611" y="4379509"/>
+            <a:ext cx="129357" cy="0"/>
+          </a:xfrm>
+          <a:prstGeom prst="line">
+            <a:avLst/>
+          </a:prstGeom>
+          <a:ln>
+            <a:solidFill>
+              <a:srgbClr val="FF0000"/>
+            </a:solidFill>
+          </a:ln>
+        </p:spPr>
+        <p:style>
+          <a:lnRef idx="2">
+            <a:schemeClr val="accent1"/>
+          </a:lnRef>
+          <a:fillRef idx="0">
+            <a:schemeClr val="accent1"/>
+          </a:fillRef>
+          <a:effectRef idx="1">
+            <a:schemeClr val="accent1"/>
+          </a:effectRef>
+          <a:fontRef idx="minor">
+            <a:schemeClr val="tx1"/>
+          </a:fontRef>
+        </p:style>
+      </p:cxnSp>
+      <p:cxnSp>
+        <p:nvCxnSpPr>
+          <p:cNvPr id="300" name="Straight Connector 299">
+            <a:extLst>
+              <a:ext uri="{FF2B5EF4-FFF2-40B4-BE49-F238E27FC236}">
+                <a16:creationId xmlns:a16="http://schemas.microsoft.com/office/drawing/2014/main" id="{0F4BABAB-0892-D3B0-D55E-BD3784FEB915}"/>
+              </a:ext>
+            </a:extLst>
+          </p:cNvPr>
+          <p:cNvCxnSpPr>
+            <a:cxnSpLocks/>
+          </p:cNvCxnSpPr>
+          <p:nvPr/>
+        </p:nvCxnSpPr>
+        <p:spPr>
+          <a:xfrm>
+            <a:off x="1855431" y="4882165"/>
+            <a:ext cx="129357" cy="0"/>
+          </a:xfrm>
+          <a:prstGeom prst="line">
+            <a:avLst/>
+          </a:prstGeom>
+          <a:ln>
+            <a:solidFill>
+              <a:srgbClr val="FF0000"/>
+            </a:solidFill>
+          </a:ln>
+        </p:spPr>
+        <p:style>
+          <a:lnRef idx="2">
+            <a:schemeClr val="accent1"/>
+          </a:lnRef>
+          <a:fillRef idx="0">
+            <a:schemeClr val="accent1"/>
+          </a:fillRef>
+          <a:effectRef idx="1">
+            <a:schemeClr val="accent1"/>
+          </a:effectRef>
+          <a:fontRef idx="minor">
+            <a:schemeClr val="tx1"/>
+          </a:fontRef>
+        </p:style>
+      </p:cxnSp>
+      <p:sp>
+        <p:nvSpPr>
+          <p:cNvPr id="301" name="TextBox 300">
+            <a:extLst>
+              <a:ext uri="{FF2B5EF4-FFF2-40B4-BE49-F238E27FC236}">
+                <a16:creationId xmlns:a16="http://schemas.microsoft.com/office/drawing/2014/main" id="{ED20CDE3-9177-87FB-4C30-2B01236545E4}"/>
+              </a:ext>
+            </a:extLst>
+          </p:cNvPr>
+          <p:cNvSpPr txBox="1"/>
+          <p:nvPr/>
+        </p:nvSpPr>
+        <p:spPr>
+          <a:xfrm>
+            <a:off x="1910825" y="3752331"/>
+            <a:ext cx="639919" cy="230832"/>
+          </a:xfrm>
+          <a:prstGeom prst="rect">
+            <a:avLst/>
+          </a:prstGeom>
+          <a:noFill/>
+        </p:spPr>
+        <p:txBody>
+          <a:bodyPr wrap="none" rtlCol="0">
+            <a:spAutoFit/>
+          </a:bodyPr>
+          <a:lstStyle/>
+          <a:p>
+            <a:pPr algn="ctr"/>
+            <a:r>
+              <a:rPr lang="en-US" sz="900" dirty="0" err="1">
+                <a:solidFill>
+                  <a:srgbClr val="FF0000"/>
+                </a:solidFill>
+              </a:rPr>
+              <a:t>reg_write</a:t>
+            </a:r>
+            <a:endParaRPr lang="en-US" sz="900" dirty="0">
+              <a:solidFill>
+                <a:srgbClr val="FF0000"/>
+              </a:solidFill>
+            </a:endParaRPr>
+          </a:p>
+        </p:txBody>
+      </p:sp>
+      <p:sp>
+        <p:nvSpPr>
+          <p:cNvPr id="302" name="TextBox 301">
+            <a:extLst>
+              <a:ext uri="{FF2B5EF4-FFF2-40B4-BE49-F238E27FC236}">
+                <a16:creationId xmlns:a16="http://schemas.microsoft.com/office/drawing/2014/main" id="{A8903A66-4149-B3E0-71CB-4F434A4B81E9}"/>
+              </a:ext>
+            </a:extLst>
+          </p:cNvPr>
+          <p:cNvSpPr txBox="1"/>
+          <p:nvPr/>
+        </p:nvSpPr>
+        <p:spPr>
+          <a:xfrm>
+            <a:off x="1924686" y="4088320"/>
+            <a:ext cx="740908" cy="230832"/>
+          </a:xfrm>
+          <a:prstGeom prst="rect">
+            <a:avLst/>
+          </a:prstGeom>
+          <a:noFill/>
+        </p:spPr>
+        <p:txBody>
+          <a:bodyPr wrap="none" rtlCol="0">
+            <a:spAutoFit/>
+          </a:bodyPr>
+          <a:lstStyle/>
+          <a:p>
+            <a:pPr algn="ctr"/>
+            <a:r>
+              <a:rPr lang="en-US" sz="900" dirty="0" err="1">
+                <a:solidFill>
+                  <a:srgbClr val="FF0000"/>
+                </a:solidFill>
+              </a:rPr>
+              <a:t>mem_write</a:t>
+            </a:r>
+            <a:endParaRPr lang="en-US" sz="900" dirty="0">
+              <a:solidFill>
+                <a:srgbClr val="FF0000"/>
+              </a:solidFill>
+            </a:endParaRPr>
+          </a:p>
+        </p:txBody>
+      </p:sp>
+      <p:sp>
+        <p:nvSpPr>
+          <p:cNvPr id="305" name="TextBox 304">
+            <a:extLst>
+              <a:ext uri="{FF2B5EF4-FFF2-40B4-BE49-F238E27FC236}">
+                <a16:creationId xmlns:a16="http://schemas.microsoft.com/office/drawing/2014/main" id="{01A852A7-AC0F-A78F-97F1-417889CC75AC}"/>
+              </a:ext>
+            </a:extLst>
+          </p:cNvPr>
+          <p:cNvSpPr txBox="1"/>
+          <p:nvPr/>
+        </p:nvSpPr>
+        <p:spPr>
+          <a:xfrm>
+            <a:off x="1921288" y="4754834"/>
+            <a:ext cx="639919" cy="230832"/>
+          </a:xfrm>
+          <a:prstGeom prst="rect">
+            <a:avLst/>
+          </a:prstGeom>
+          <a:noFill/>
+        </p:spPr>
+        <p:txBody>
+          <a:bodyPr wrap="none" rtlCol="0">
+            <a:spAutoFit/>
+          </a:bodyPr>
+          <a:lstStyle/>
+          <a:p>
+            <a:pPr algn="ctr"/>
+            <a:r>
+              <a:rPr lang="en-US" sz="900" dirty="0" err="1">
+                <a:solidFill>
+                  <a:srgbClr val="FF0000"/>
+                </a:solidFill>
+              </a:rPr>
+              <a:t>reg_write</a:t>
+            </a:r>
+            <a:endParaRPr lang="en-US" sz="900" dirty="0">
+              <a:solidFill>
+                <a:srgbClr val="FF0000"/>
+              </a:solidFill>
+            </a:endParaRPr>
+          </a:p>
+        </p:txBody>
+      </p:sp>
+      <p:sp>
+        <p:nvSpPr>
+          <p:cNvPr id="312" name="TextBox 311">
+            <a:extLst>
+              <a:ext uri="{FF2B5EF4-FFF2-40B4-BE49-F238E27FC236}">
+                <a16:creationId xmlns:a16="http://schemas.microsoft.com/office/drawing/2014/main" id="{67F2ABA9-238C-E617-4BC2-A4E7DB044BB8}"/>
+              </a:ext>
+            </a:extLst>
+          </p:cNvPr>
+          <p:cNvSpPr txBox="1"/>
+          <p:nvPr/>
+        </p:nvSpPr>
+        <p:spPr>
+          <a:xfrm>
+            <a:off x="1913967" y="3909482"/>
+            <a:ext cx="718466" cy="230832"/>
+          </a:xfrm>
+          <a:prstGeom prst="rect">
+            <a:avLst/>
+          </a:prstGeom>
+          <a:noFill/>
+        </p:spPr>
+        <p:txBody>
+          <a:bodyPr wrap="none" rtlCol="0">
+            <a:spAutoFit/>
+          </a:bodyPr>
+          <a:lstStyle/>
+          <a:p>
+            <a:pPr algn="ctr"/>
+            <a:r>
+              <a:rPr lang="en-US" sz="900" dirty="0" err="1">
+                <a:solidFill>
+                  <a:srgbClr val="FF0000"/>
+                </a:solidFill>
+              </a:rPr>
+              <a:t>mem_read</a:t>
+            </a:r>
+            <a:endParaRPr lang="en-US" sz="900" dirty="0">
+              <a:solidFill>
+                <a:srgbClr val="FF0000"/>
+              </a:solidFill>
+            </a:endParaRPr>
+          </a:p>
+        </p:txBody>
+      </p:sp>
+      <p:sp>
+        <p:nvSpPr>
+          <p:cNvPr id="315" name="TextBox 314">
+            <a:extLst>
+              <a:ext uri="{FF2B5EF4-FFF2-40B4-BE49-F238E27FC236}">
+                <a16:creationId xmlns:a16="http://schemas.microsoft.com/office/drawing/2014/main" id="{FF4F38E4-EB02-9859-8422-DB9BE202E0AC}"/>
+              </a:ext>
+            </a:extLst>
+          </p:cNvPr>
+          <p:cNvSpPr txBox="1"/>
+          <p:nvPr/>
+        </p:nvSpPr>
+        <p:spPr>
+          <a:xfrm>
+            <a:off x="1939153" y="4247038"/>
+            <a:ext cx="548547" cy="230832"/>
+          </a:xfrm>
+          <a:prstGeom prst="rect">
+            <a:avLst/>
+          </a:prstGeom>
+          <a:noFill/>
+        </p:spPr>
+        <p:txBody>
+          <a:bodyPr wrap="none" rtlCol="0">
+            <a:spAutoFit/>
+          </a:bodyPr>
+          <a:lstStyle/>
+          <a:p>
+            <a:pPr algn="ctr"/>
+            <a:r>
+              <a:rPr lang="en-US" sz="900" dirty="0" err="1">
+                <a:solidFill>
+                  <a:srgbClr val="FF0000"/>
+                </a:solidFill>
+              </a:rPr>
+              <a:t>alu_src</a:t>
+            </a:r>
+            <a:endParaRPr lang="en-US" sz="900" dirty="0">
+              <a:solidFill>
+                <a:srgbClr val="FF0000"/>
+              </a:solidFill>
+            </a:endParaRPr>
+          </a:p>
+        </p:txBody>
+      </p:sp>
+      <p:sp>
+        <p:nvSpPr>
+          <p:cNvPr id="317" name="TextBox 316">
+            <a:extLst>
+              <a:ext uri="{FF2B5EF4-FFF2-40B4-BE49-F238E27FC236}">
+                <a16:creationId xmlns:a16="http://schemas.microsoft.com/office/drawing/2014/main" id="{58F749AC-80DF-6C5D-7C0E-D9F6BBEB4ED7}"/>
+              </a:ext>
+            </a:extLst>
+          </p:cNvPr>
+          <p:cNvSpPr txBox="1"/>
+          <p:nvPr/>
+        </p:nvSpPr>
+        <p:spPr>
+          <a:xfrm>
+            <a:off x="1940766" y="4388942"/>
+            <a:ext cx="537327" cy="230832"/>
+          </a:xfrm>
+          <a:prstGeom prst="rect">
+            <a:avLst/>
+          </a:prstGeom>
+          <a:noFill/>
+        </p:spPr>
+        <p:txBody>
+          <a:bodyPr wrap="none" rtlCol="0">
+            <a:spAutoFit/>
+          </a:bodyPr>
+          <a:lstStyle/>
+          <a:p>
+            <a:pPr algn="ctr"/>
+            <a:r>
+              <a:rPr lang="en-US" sz="900" dirty="0">
+                <a:solidFill>
+                  <a:srgbClr val="FF0000"/>
+                </a:solidFill>
+              </a:rPr>
+              <a:t>branch</a:t>
+            </a:r>
+          </a:p>
+        </p:txBody>
+      </p:sp>
+      <p:sp>
+        <p:nvSpPr>
+          <p:cNvPr id="318" name="TextBox 317">
+            <a:extLst>
+              <a:ext uri="{FF2B5EF4-FFF2-40B4-BE49-F238E27FC236}">
+                <a16:creationId xmlns:a16="http://schemas.microsoft.com/office/drawing/2014/main" id="{1897D665-26CE-5E93-6740-FCF11BEC3D47}"/>
+              </a:ext>
+            </a:extLst>
+          </p:cNvPr>
+          <p:cNvSpPr txBox="1"/>
+          <p:nvPr/>
+        </p:nvSpPr>
+        <p:spPr>
+          <a:xfrm>
+            <a:off x="1932547" y="4593073"/>
+            <a:ext cx="684803" cy="230832"/>
+          </a:xfrm>
+          <a:prstGeom prst="rect">
+            <a:avLst/>
+          </a:prstGeom>
+          <a:noFill/>
+        </p:spPr>
+        <p:txBody>
+          <a:bodyPr wrap="none" rtlCol="0">
+            <a:spAutoFit/>
+          </a:bodyPr>
+          <a:lstStyle/>
+          <a:p>
+            <a:pPr algn="ctr"/>
+            <a:r>
+              <a:rPr lang="en-US" sz="900" dirty="0" err="1">
+                <a:solidFill>
+                  <a:srgbClr val="FF0000"/>
+                </a:solidFill>
+              </a:rPr>
+              <a:t>load_addr</a:t>
+            </a:r>
+            <a:endParaRPr lang="en-US" sz="900" dirty="0">
+              <a:solidFill>
+                <a:srgbClr val="FF0000"/>
+              </a:solidFill>
+            </a:endParaRPr>
+          </a:p>
+        </p:txBody>
+      </p:sp>
+      <p:sp>
+        <p:nvSpPr>
+          <p:cNvPr id="319" name="TextBox 318">
+            <a:extLst>
+              <a:ext uri="{FF2B5EF4-FFF2-40B4-BE49-F238E27FC236}">
+                <a16:creationId xmlns:a16="http://schemas.microsoft.com/office/drawing/2014/main" id="{92B1CFC4-7F5B-1E5A-803E-C1E740D00A3B}"/>
+              </a:ext>
+            </a:extLst>
+          </p:cNvPr>
+          <p:cNvSpPr txBox="1"/>
+          <p:nvPr/>
+        </p:nvSpPr>
+        <p:spPr>
+          <a:xfrm>
+            <a:off x="2259741" y="5250388"/>
+            <a:ext cx="780983" cy="230832"/>
+          </a:xfrm>
+          <a:prstGeom prst="rect">
+            <a:avLst/>
+          </a:prstGeom>
+          <a:noFill/>
+        </p:spPr>
+        <p:txBody>
+          <a:bodyPr wrap="none" rtlCol="0">
+            <a:spAutoFit/>
+          </a:bodyPr>
+          <a:lstStyle/>
+          <a:p>
+            <a:pPr algn="ctr"/>
+            <a:r>
+              <a:rPr lang="en-US" sz="900" dirty="0" err="1">
+                <a:solidFill>
+                  <a:srgbClr val="FF0000"/>
+                </a:solidFill>
+              </a:rPr>
+              <a:t>if_id_alu_op</a:t>
+            </a:r>
+            <a:endParaRPr lang="en-US" sz="900" dirty="0">
+              <a:solidFill>
+                <a:srgbClr val="FF0000"/>
+              </a:solidFill>
+            </a:endParaRPr>
+          </a:p>
+        </p:txBody>
+      </p:sp>
+      <p:sp>
+        <p:nvSpPr>
+          <p:cNvPr id="118" name="TextBox 117">
+            <a:extLst>
+              <a:ext uri="{FF2B5EF4-FFF2-40B4-BE49-F238E27FC236}">
+                <a16:creationId xmlns:a16="http://schemas.microsoft.com/office/drawing/2014/main" id="{0B8BD1C0-B4F2-0ACC-516B-041090A97A30}"/>
+              </a:ext>
+            </a:extLst>
+          </p:cNvPr>
+          <p:cNvSpPr txBox="1"/>
+          <p:nvPr/>
+        </p:nvSpPr>
+        <p:spPr>
+          <a:xfrm>
+            <a:off x="1230394" y="3832704"/>
+            <a:ext cx="635110" cy="230832"/>
+          </a:xfrm>
+          <a:prstGeom prst="rect">
+            <a:avLst/>
+          </a:prstGeom>
+          <a:noFill/>
+        </p:spPr>
+        <p:txBody>
+          <a:bodyPr wrap="none" rtlCol="0">
+            <a:spAutoFit/>
+          </a:bodyPr>
+          <a:lstStyle/>
+          <a:p>
+            <a:pPr algn="ctr"/>
+            <a:r>
+              <a:rPr lang="en-US" sz="900" dirty="0">
+                <a:solidFill>
+                  <a:srgbClr val="FF0000"/>
+                </a:solidFill>
+              </a:rPr>
+              <a:t>“</a:t>
+            </a:r>
+            <a:r>
+              <a:rPr lang="en-US" sz="900" dirty="0" err="1">
+                <a:solidFill>
+                  <a:srgbClr val="FF0000"/>
+                </a:solidFill>
+              </a:rPr>
+              <a:t>if_id</a:t>
+            </a:r>
+            <a:r>
+              <a:rPr lang="en-US" sz="900" dirty="0">
+                <a:solidFill>
+                  <a:srgbClr val="FF0000"/>
+                </a:solidFill>
+              </a:rPr>
+              <a:t>_” +</a:t>
+            </a:r>
+          </a:p>
+        </p:txBody>
+      </p:sp>
+      <p:cxnSp>
+        <p:nvCxnSpPr>
+          <p:cNvPr id="120" name="Straight Connector 119">
+            <a:extLst>
+              <a:ext uri="{FF2B5EF4-FFF2-40B4-BE49-F238E27FC236}">
+                <a16:creationId xmlns:a16="http://schemas.microsoft.com/office/drawing/2014/main" id="{A0C81165-C217-A4B4-7E5D-89CC2B072118}"/>
+              </a:ext>
+            </a:extLst>
+          </p:cNvPr>
+          <p:cNvCxnSpPr>
+            <a:cxnSpLocks/>
+          </p:cNvCxnSpPr>
+          <p:nvPr/>
+        </p:nvCxnSpPr>
+        <p:spPr>
+          <a:xfrm>
+            <a:off x="2498032" y="5606299"/>
+            <a:ext cx="0" cy="147099"/>
+          </a:xfrm>
+          <a:prstGeom prst="line">
+            <a:avLst/>
+          </a:prstGeom>
+          <a:ln>
+            <a:solidFill>
+              <a:schemeClr val="accent5"/>
+            </a:solidFill>
+          </a:ln>
+        </p:spPr>
+        <p:style>
+          <a:lnRef idx="2">
+            <a:schemeClr val="accent1"/>
+          </a:lnRef>
+          <a:fillRef idx="0">
+            <a:schemeClr val="accent1"/>
+          </a:fillRef>
+          <a:effectRef idx="1">
+            <a:schemeClr val="accent1"/>
+          </a:effectRef>
+          <a:fontRef idx="minor">
+            <a:schemeClr val="tx1"/>
+          </a:fontRef>
+        </p:style>
+      </p:cxnSp>
+      <p:cxnSp>
+        <p:nvCxnSpPr>
+          <p:cNvPr id="122" name="Straight Connector 121">
+            <a:extLst>
+              <a:ext uri="{FF2B5EF4-FFF2-40B4-BE49-F238E27FC236}">
+                <a16:creationId xmlns:a16="http://schemas.microsoft.com/office/drawing/2014/main" id="{78E020F7-AAF7-2283-3A99-7DFF6F0B3E63}"/>
+              </a:ext>
+            </a:extLst>
+          </p:cNvPr>
+          <p:cNvCxnSpPr>
+            <a:cxnSpLocks/>
+          </p:cNvCxnSpPr>
+          <p:nvPr/>
+        </p:nvCxnSpPr>
+        <p:spPr>
+          <a:xfrm>
+            <a:off x="2495383" y="5753398"/>
+            <a:ext cx="2793054" cy="0"/>
+          </a:xfrm>
+          <a:prstGeom prst="line">
+            <a:avLst/>
+          </a:prstGeom>
+          <a:ln>
+            <a:solidFill>
+              <a:schemeClr val="accent5"/>
+            </a:solidFill>
+          </a:ln>
+        </p:spPr>
+        <p:style>
+          <a:lnRef idx="2">
+            <a:schemeClr val="accent1"/>
+          </a:lnRef>
+          <a:fillRef idx="0">
+            <a:schemeClr val="accent1"/>
+          </a:fillRef>
+          <a:effectRef idx="1">
+            <a:schemeClr val="accent1"/>
+          </a:effectRef>
+          <a:fontRef idx="minor">
+            <a:schemeClr val="tx1"/>
+          </a:fontRef>
+        </p:style>
+      </p:cxnSp>
+      <p:cxnSp>
+        <p:nvCxnSpPr>
+          <p:cNvPr id="320" name="Straight Arrow Connector 319">
+            <a:extLst>
+              <a:ext uri="{FF2B5EF4-FFF2-40B4-BE49-F238E27FC236}">
+                <a16:creationId xmlns:a16="http://schemas.microsoft.com/office/drawing/2014/main" id="{A1DC1486-E2FC-B58B-55C4-091DB2C24889}"/>
+              </a:ext>
+            </a:extLst>
+          </p:cNvPr>
+          <p:cNvCxnSpPr>
+            <a:cxnSpLocks/>
+          </p:cNvCxnSpPr>
+          <p:nvPr/>
+        </p:nvCxnSpPr>
+        <p:spPr>
+          <a:xfrm flipV="1">
+            <a:off x="5294181" y="5587738"/>
+            <a:ext cx="0" cy="165660"/>
+          </a:xfrm>
+          <a:prstGeom prst="straightConnector1">
+            <a:avLst/>
+          </a:prstGeom>
+          <a:ln>
+            <a:solidFill>
+              <a:schemeClr val="accent5"/>
+            </a:solidFill>
+            <a:tailEnd type="triangle"/>
+          </a:ln>
+        </p:spPr>
+        <p:style>
+          <a:lnRef idx="2">
+            <a:schemeClr val="accent1"/>
+          </a:lnRef>
+          <a:fillRef idx="0">
+            <a:schemeClr val="accent1"/>
+          </a:fillRef>
+          <a:effectRef idx="1">
+            <a:schemeClr val="accent1"/>
+          </a:effectRef>
+          <a:fontRef idx="minor">
+            <a:schemeClr val="tx1"/>
+          </a:fontRef>
+        </p:style>
+      </p:cxnSp>
+      <p:cxnSp>
+        <p:nvCxnSpPr>
+          <p:cNvPr id="328" name="Straight Connector 327">
+            <a:extLst>
+              <a:ext uri="{FF2B5EF4-FFF2-40B4-BE49-F238E27FC236}">
+                <a16:creationId xmlns:a16="http://schemas.microsoft.com/office/drawing/2014/main" id="{605A1D94-7A6A-113C-8133-0BCA8A594667}"/>
+              </a:ext>
+            </a:extLst>
+          </p:cNvPr>
+          <p:cNvCxnSpPr>
+            <a:cxnSpLocks/>
+          </p:cNvCxnSpPr>
+          <p:nvPr/>
+        </p:nvCxnSpPr>
+        <p:spPr>
+          <a:xfrm>
+            <a:off x="7441605" y="5606299"/>
+            <a:ext cx="0" cy="147099"/>
+          </a:xfrm>
+          <a:prstGeom prst="line">
+            <a:avLst/>
+          </a:prstGeom>
+          <a:ln>
+            <a:solidFill>
+              <a:schemeClr val="accent5"/>
+            </a:solidFill>
+          </a:ln>
+        </p:spPr>
+        <p:style>
+          <a:lnRef idx="2">
+            <a:schemeClr val="accent1"/>
+          </a:lnRef>
+          <a:fillRef idx="0">
+            <a:schemeClr val="accent1"/>
+          </a:fillRef>
+          <a:effectRef idx="1">
+            <a:schemeClr val="accent1"/>
+          </a:effectRef>
+          <a:fontRef idx="minor">
+            <a:schemeClr val="tx1"/>
+          </a:fontRef>
+        </p:style>
+      </p:cxnSp>
+      <p:cxnSp>
+        <p:nvCxnSpPr>
+          <p:cNvPr id="329" name="Straight Connector 328">
+            <a:extLst>
+              <a:ext uri="{FF2B5EF4-FFF2-40B4-BE49-F238E27FC236}">
+                <a16:creationId xmlns:a16="http://schemas.microsoft.com/office/drawing/2014/main" id="{265E83F7-F439-A522-B003-361BCD9F877C}"/>
+              </a:ext>
+            </a:extLst>
+          </p:cNvPr>
+          <p:cNvCxnSpPr>
+            <a:cxnSpLocks/>
+          </p:cNvCxnSpPr>
+          <p:nvPr/>
+        </p:nvCxnSpPr>
+        <p:spPr>
+          <a:xfrm>
+            <a:off x="7436599" y="5753398"/>
+            <a:ext cx="2452119" cy="0"/>
+          </a:xfrm>
+          <a:prstGeom prst="line">
+            <a:avLst/>
+          </a:prstGeom>
+          <a:ln>
+            <a:solidFill>
+              <a:schemeClr val="accent5"/>
+            </a:solidFill>
+          </a:ln>
+        </p:spPr>
+        <p:style>
+          <a:lnRef idx="2">
+            <a:schemeClr val="accent1"/>
+          </a:lnRef>
+          <a:fillRef idx="0">
+            <a:schemeClr val="accent1"/>
+          </a:fillRef>
+          <a:effectRef idx="1">
+            <a:schemeClr val="accent1"/>
+          </a:effectRef>
+          <a:fontRef idx="minor">
+            <a:schemeClr val="tx1"/>
+          </a:fontRef>
+        </p:style>
+      </p:cxnSp>
+      <p:cxnSp>
+        <p:nvCxnSpPr>
+          <p:cNvPr id="330" name="Straight Arrow Connector 329">
+            <a:extLst>
+              <a:ext uri="{FF2B5EF4-FFF2-40B4-BE49-F238E27FC236}">
+                <a16:creationId xmlns:a16="http://schemas.microsoft.com/office/drawing/2014/main" id="{F70F8830-D310-A459-2BFE-0AED5707A1E0}"/>
+              </a:ext>
+            </a:extLst>
+          </p:cNvPr>
+          <p:cNvCxnSpPr>
+            <a:cxnSpLocks/>
+          </p:cNvCxnSpPr>
+          <p:nvPr/>
+        </p:nvCxnSpPr>
+        <p:spPr>
+          <a:xfrm flipV="1">
+            <a:off x="9884249" y="5587738"/>
+            <a:ext cx="0" cy="165660"/>
+          </a:xfrm>
+          <a:prstGeom prst="straightConnector1">
+            <a:avLst/>
+          </a:prstGeom>
+          <a:ln>
+            <a:solidFill>
+              <a:schemeClr val="accent5"/>
+            </a:solidFill>
+            <a:tailEnd type="triangle"/>
+          </a:ln>
+        </p:spPr>
+        <p:style>
+          <a:lnRef idx="2">
+            <a:schemeClr val="accent1"/>
+          </a:lnRef>
+          <a:fillRef idx="0">
+            <a:schemeClr val="accent1"/>
+          </a:fillRef>
+          <a:effectRef idx="1">
+            <a:schemeClr val="accent1"/>
+          </a:effectRef>
+          <a:fontRef idx="minor">
+            <a:schemeClr val="tx1"/>
+          </a:fontRef>
+        </p:style>
+      </p:cxnSp>
+      <p:cxnSp>
+        <p:nvCxnSpPr>
+          <p:cNvPr id="332" name="Straight Connector 331">
+            <a:extLst>
+              <a:ext uri="{FF2B5EF4-FFF2-40B4-BE49-F238E27FC236}">
+                <a16:creationId xmlns:a16="http://schemas.microsoft.com/office/drawing/2014/main" id="{1EF398E9-A30A-C9EE-1782-2F363E7060A0}"/>
+              </a:ext>
+            </a:extLst>
+          </p:cNvPr>
+          <p:cNvCxnSpPr>
+            <a:cxnSpLocks/>
+          </p:cNvCxnSpPr>
+          <p:nvPr/>
+        </p:nvCxnSpPr>
+        <p:spPr>
+          <a:xfrm>
+            <a:off x="5409343" y="5606299"/>
+            <a:ext cx="0" cy="147099"/>
+          </a:xfrm>
+          <a:prstGeom prst="line">
+            <a:avLst/>
+          </a:prstGeom>
+          <a:ln>
+            <a:solidFill>
+              <a:schemeClr val="accent5"/>
+            </a:solidFill>
+          </a:ln>
+        </p:spPr>
+        <p:style>
+          <a:lnRef idx="2">
+            <a:schemeClr val="accent1"/>
+          </a:lnRef>
+          <a:fillRef idx="0">
+            <a:schemeClr val="accent1"/>
+          </a:fillRef>
+          <a:effectRef idx="1">
+            <a:schemeClr val="accent1"/>
+          </a:effectRef>
+          <a:fontRef idx="minor">
+            <a:schemeClr val="tx1"/>
+          </a:fontRef>
+        </p:style>
+      </p:cxnSp>
+      <p:cxnSp>
+        <p:nvCxnSpPr>
+          <p:cNvPr id="333" name="Straight Connector 332">
+            <a:extLst>
+              <a:ext uri="{FF2B5EF4-FFF2-40B4-BE49-F238E27FC236}">
+                <a16:creationId xmlns:a16="http://schemas.microsoft.com/office/drawing/2014/main" id="{1A521DFF-8EDE-FE11-DF8D-01D4AD0BADFB}"/>
+              </a:ext>
+            </a:extLst>
+          </p:cNvPr>
+          <p:cNvCxnSpPr>
+            <a:cxnSpLocks/>
+          </p:cNvCxnSpPr>
+          <p:nvPr/>
+        </p:nvCxnSpPr>
+        <p:spPr>
+          <a:xfrm>
+            <a:off x="5406694" y="5753398"/>
+            <a:ext cx="1948570" cy="0"/>
+          </a:xfrm>
+          <a:prstGeom prst="line">
+            <a:avLst/>
+          </a:prstGeom>
+          <a:ln>
+            <a:solidFill>
+              <a:schemeClr val="accent5"/>
+            </a:solidFill>
+          </a:ln>
+        </p:spPr>
+        <p:style>
+          <a:lnRef idx="2">
+            <a:schemeClr val="accent1"/>
+          </a:lnRef>
+          <a:fillRef idx="0">
+            <a:schemeClr val="accent1"/>
+          </a:fillRef>
+          <a:effectRef idx="1">
+            <a:schemeClr val="accent1"/>
+          </a:effectRef>
+          <a:fontRef idx="minor">
+            <a:schemeClr val="tx1"/>
+          </a:fontRef>
+        </p:style>
+      </p:cxnSp>
+      <p:cxnSp>
+        <p:nvCxnSpPr>
+          <p:cNvPr id="334" name="Straight Arrow Connector 333">
+            <a:extLst>
+              <a:ext uri="{FF2B5EF4-FFF2-40B4-BE49-F238E27FC236}">
+                <a16:creationId xmlns:a16="http://schemas.microsoft.com/office/drawing/2014/main" id="{74BD6E94-2C93-C767-779D-8619020B9218}"/>
+              </a:ext>
+            </a:extLst>
+          </p:cNvPr>
+          <p:cNvCxnSpPr>
+            <a:cxnSpLocks/>
+          </p:cNvCxnSpPr>
+          <p:nvPr/>
+        </p:nvCxnSpPr>
+        <p:spPr>
+          <a:xfrm flipV="1">
+            <a:off x="7352366" y="5587738"/>
+            <a:ext cx="0" cy="165660"/>
+          </a:xfrm>
+          <a:prstGeom prst="straightConnector1">
+            <a:avLst/>
+          </a:prstGeom>
+          <a:ln>
+            <a:solidFill>
+              <a:schemeClr val="accent5"/>
+            </a:solidFill>
+            <a:tailEnd type="triangle"/>
+          </a:ln>
+        </p:spPr>
+        <p:style>
+          <a:lnRef idx="2">
+            <a:schemeClr val="accent1"/>
+          </a:lnRef>
+          <a:fillRef idx="0">
+            <a:schemeClr val="accent1"/>
+          </a:fillRef>
+          <a:effectRef idx="1">
+            <a:schemeClr val="accent1"/>
+          </a:effectRef>
+          <a:fontRef idx="minor">
+            <a:schemeClr val="tx1"/>
+          </a:fontRef>
+        </p:style>
+      </p:cxnSp>
+      <p:sp>
+        <p:nvSpPr>
+          <p:cNvPr id="337" name="TextBox 336">
+            <a:extLst>
+              <a:ext uri="{FF2B5EF4-FFF2-40B4-BE49-F238E27FC236}">
+                <a16:creationId xmlns:a16="http://schemas.microsoft.com/office/drawing/2014/main" id="{27443432-8C0A-36B8-D59E-764BB94F2784}"/>
+              </a:ext>
+            </a:extLst>
+          </p:cNvPr>
+          <p:cNvSpPr txBox="1"/>
+          <p:nvPr/>
+        </p:nvSpPr>
+        <p:spPr>
+          <a:xfrm>
+            <a:off x="3609208" y="5753398"/>
+            <a:ext cx="813043" cy="230832"/>
+          </a:xfrm>
+          <a:prstGeom prst="rect">
+            <a:avLst/>
+          </a:prstGeom>
+          <a:noFill/>
+        </p:spPr>
+        <p:txBody>
+          <a:bodyPr wrap="none" rtlCol="0">
+            <a:spAutoFit/>
+          </a:bodyPr>
+          <a:lstStyle/>
+          <a:p>
+            <a:pPr algn="ctr"/>
+            <a:r>
+              <a:rPr lang="en-US" sz="900" dirty="0" err="1">
+                <a:solidFill>
+                  <a:schemeClr val="accent5"/>
+                </a:solidFill>
+              </a:rPr>
+              <a:t>if_id</a:t>
+            </a:r>
+            <a:r>
+              <a:rPr lang="en-US" sz="900" dirty="0">
+                <a:solidFill>
+                  <a:schemeClr val="accent5"/>
+                </a:solidFill>
+              </a:rPr>
+              <a:t> </a:t>
+            </a:r>
+            <a:r>
+              <a:rPr lang="en-US" sz="900" dirty="0">
+                <a:solidFill>
+                  <a:schemeClr val="accent5"/>
+                </a:solidFill>
+                <a:sym typeface="Wingdings" panose="05000000000000000000" pitchFamily="2" charset="2"/>
+              </a:rPr>
+              <a:t> </a:t>
+            </a:r>
+            <a:r>
+              <a:rPr lang="en-US" sz="900" dirty="0" err="1">
+                <a:solidFill>
+                  <a:schemeClr val="accent5"/>
+                </a:solidFill>
+                <a:sym typeface="Wingdings" panose="05000000000000000000" pitchFamily="2" charset="2"/>
+              </a:rPr>
+              <a:t>id_ex</a:t>
+            </a:r>
+            <a:endParaRPr lang="en-US" sz="900" dirty="0">
+              <a:solidFill>
+                <a:schemeClr val="accent5"/>
+              </a:solidFill>
+            </a:endParaRPr>
+          </a:p>
+        </p:txBody>
+      </p:sp>
+      <p:sp>
+        <p:nvSpPr>
+          <p:cNvPr id="339" name="TextBox 338">
+            <a:extLst>
+              <a:ext uri="{FF2B5EF4-FFF2-40B4-BE49-F238E27FC236}">
+                <a16:creationId xmlns:a16="http://schemas.microsoft.com/office/drawing/2014/main" id="{F09CFD47-2B0A-FDC6-62C2-C5962DEFAB00}"/>
+              </a:ext>
+            </a:extLst>
+          </p:cNvPr>
+          <p:cNvSpPr txBox="1"/>
+          <p:nvPr/>
+        </p:nvSpPr>
+        <p:spPr>
+          <a:xfrm>
+            <a:off x="5872622" y="5753398"/>
+            <a:ext cx="1027845" cy="230832"/>
+          </a:xfrm>
+          <a:prstGeom prst="rect">
+            <a:avLst/>
+          </a:prstGeom>
+          <a:noFill/>
+        </p:spPr>
+        <p:txBody>
+          <a:bodyPr wrap="none" rtlCol="0">
+            <a:spAutoFit/>
+          </a:bodyPr>
+          <a:lstStyle/>
+          <a:p>
+            <a:pPr algn="ctr"/>
+            <a:r>
+              <a:rPr lang="en-US" sz="900" dirty="0" err="1">
+                <a:solidFill>
+                  <a:schemeClr val="accent5"/>
+                </a:solidFill>
+              </a:rPr>
+              <a:t>id_ex</a:t>
+            </a:r>
+            <a:r>
+              <a:rPr lang="en-US" sz="900" dirty="0">
+                <a:solidFill>
+                  <a:schemeClr val="accent5"/>
+                </a:solidFill>
+              </a:rPr>
+              <a:t> </a:t>
+            </a:r>
+            <a:r>
+              <a:rPr lang="en-US" sz="900" dirty="0">
+                <a:solidFill>
+                  <a:schemeClr val="accent5"/>
+                </a:solidFill>
+                <a:sym typeface="Wingdings" panose="05000000000000000000" pitchFamily="2" charset="2"/>
+              </a:rPr>
+              <a:t> </a:t>
+            </a:r>
+            <a:r>
+              <a:rPr lang="en-US" sz="900" dirty="0" err="1">
+                <a:solidFill>
+                  <a:schemeClr val="accent5"/>
+                </a:solidFill>
+                <a:sym typeface="Wingdings" panose="05000000000000000000" pitchFamily="2" charset="2"/>
+              </a:rPr>
+              <a:t>ex_mem</a:t>
+            </a:r>
+            <a:endParaRPr lang="en-US" sz="900" dirty="0">
+              <a:solidFill>
+                <a:schemeClr val="accent5"/>
+              </a:solidFill>
+            </a:endParaRPr>
+          </a:p>
+        </p:txBody>
+      </p:sp>
+      <p:sp>
+        <p:nvSpPr>
+          <p:cNvPr id="340" name="TextBox 339">
+            <a:extLst>
+              <a:ext uri="{FF2B5EF4-FFF2-40B4-BE49-F238E27FC236}">
+                <a16:creationId xmlns:a16="http://schemas.microsoft.com/office/drawing/2014/main" id="{FB675C72-9BF6-3A9E-44A3-6CF93FDB278E}"/>
+              </a:ext>
+            </a:extLst>
+          </p:cNvPr>
+          <p:cNvSpPr txBox="1"/>
+          <p:nvPr/>
+        </p:nvSpPr>
+        <p:spPr>
+          <a:xfrm>
+            <a:off x="8075828" y="5763476"/>
+            <a:ext cx="1225015" cy="230832"/>
+          </a:xfrm>
+          <a:prstGeom prst="rect">
+            <a:avLst/>
+          </a:prstGeom>
+          <a:noFill/>
+        </p:spPr>
+        <p:txBody>
+          <a:bodyPr wrap="none" rtlCol="0">
+            <a:spAutoFit/>
+          </a:bodyPr>
+          <a:lstStyle/>
+          <a:p>
+            <a:pPr algn="ctr"/>
+            <a:r>
+              <a:rPr lang="en-US" sz="900" dirty="0" err="1">
+                <a:solidFill>
+                  <a:schemeClr val="accent5"/>
+                </a:solidFill>
+              </a:rPr>
+              <a:t>ex_mem</a:t>
+            </a:r>
+            <a:r>
+              <a:rPr lang="en-US" sz="900" dirty="0">
+                <a:solidFill>
+                  <a:schemeClr val="accent5"/>
+                </a:solidFill>
+              </a:rPr>
+              <a:t> </a:t>
+            </a:r>
+            <a:r>
+              <a:rPr lang="en-US" sz="900" dirty="0">
+                <a:solidFill>
+                  <a:schemeClr val="accent5"/>
+                </a:solidFill>
+                <a:sym typeface="Wingdings" panose="05000000000000000000" pitchFamily="2" charset="2"/>
+              </a:rPr>
+              <a:t> </a:t>
+            </a:r>
+            <a:r>
+              <a:rPr lang="en-US" sz="900" dirty="0" err="1">
+                <a:solidFill>
+                  <a:schemeClr val="accent5"/>
+                </a:solidFill>
+                <a:sym typeface="Wingdings" panose="05000000000000000000" pitchFamily="2" charset="2"/>
+              </a:rPr>
+              <a:t>mem_wb</a:t>
+            </a:r>
+            <a:endParaRPr lang="en-US" sz="900" dirty="0">
+              <a:solidFill>
+                <a:schemeClr val="accent5"/>
+              </a:solidFill>
+            </a:endParaRPr>
+          </a:p>
+        </p:txBody>
+      </p:sp>
+      <p:sp>
+        <p:nvSpPr>
+          <p:cNvPr id="344" name="Rectangle 343">
+            <a:extLst>
+              <a:ext uri="{FF2B5EF4-FFF2-40B4-BE49-F238E27FC236}">
+                <a16:creationId xmlns:a16="http://schemas.microsoft.com/office/drawing/2014/main" id="{58C99F7B-4DF3-AD26-3010-F956D33065D7}"/>
+              </a:ext>
+            </a:extLst>
+          </p:cNvPr>
+          <p:cNvSpPr/>
+          <p:nvPr/>
+        </p:nvSpPr>
+        <p:spPr>
+          <a:xfrm>
+            <a:off x="10332451" y="4457089"/>
+            <a:ext cx="1383796" cy="2142167"/>
+          </a:xfrm>
+          <a:prstGeom prst="rect">
+            <a:avLst/>
+          </a:prstGeom>
+          <a:solidFill>
+            <a:schemeClr val="accent5">
+              <a:lumMod val="20000"/>
+              <a:lumOff val="80000"/>
+            </a:schemeClr>
+          </a:solidFill>
+          <a:ln>
+            <a:solidFill>
+              <a:schemeClr val="accent5"/>
+            </a:solidFill>
+          </a:ln>
+        </p:spPr>
+        <p:style>
+          <a:lnRef idx="2">
+            <a:schemeClr val="accent1">
+              <a:shade val="15000"/>
+            </a:schemeClr>
+          </a:lnRef>
+          <a:fillRef idx="1">
+            <a:schemeClr val="accent1"/>
+          </a:fillRef>
+          <a:effectRef idx="0">
+            <a:schemeClr val="accent1"/>
+          </a:effectRef>
+          <a:fontRef idx="minor">
+            <a:schemeClr val="lt1"/>
+          </a:fontRef>
+        </p:style>
+        <p:txBody>
+          <a:bodyPr rtlCol="0" anchor="ctr"/>
+          <a:lstStyle/>
+          <a:p>
+            <a:pPr algn="ctr"/>
+            <a:endParaRPr lang="en-US"/>
+          </a:p>
+        </p:txBody>
+      </p:sp>
+      <p:sp>
+        <p:nvSpPr>
+          <p:cNvPr id="345" name="TextBox 344">
+            <a:extLst>
+              <a:ext uri="{FF2B5EF4-FFF2-40B4-BE49-F238E27FC236}">
+                <a16:creationId xmlns:a16="http://schemas.microsoft.com/office/drawing/2014/main" id="{CC6F795C-FDD1-BFE4-39D5-2BD8CFFC35D0}"/>
+              </a:ext>
+            </a:extLst>
+          </p:cNvPr>
+          <p:cNvSpPr txBox="1"/>
+          <p:nvPr/>
+        </p:nvSpPr>
+        <p:spPr>
+          <a:xfrm>
+            <a:off x="10522760" y="4430966"/>
+            <a:ext cx="1074333" cy="230832"/>
+          </a:xfrm>
+          <a:prstGeom prst="rect">
+            <a:avLst/>
+          </a:prstGeom>
+          <a:noFill/>
+        </p:spPr>
+        <p:txBody>
+          <a:bodyPr wrap="none" rtlCol="0">
+            <a:spAutoFit/>
+          </a:bodyPr>
+          <a:lstStyle/>
+          <a:p>
+            <a:pPr algn="ctr"/>
+            <a:r>
+              <a:rPr lang="en-US" sz="900" u="sng" dirty="0">
+                <a:solidFill>
+                  <a:schemeClr val="accent5"/>
+                </a:solidFill>
+              </a:rPr>
+              <a:t>Pipeline Registers</a:t>
+            </a:r>
+          </a:p>
+        </p:txBody>
+      </p:sp>
+      <p:sp>
+        <p:nvSpPr>
+          <p:cNvPr id="346" name="TextBox 345">
+            <a:extLst>
+              <a:ext uri="{FF2B5EF4-FFF2-40B4-BE49-F238E27FC236}">
+                <a16:creationId xmlns:a16="http://schemas.microsoft.com/office/drawing/2014/main" id="{707ADAB3-A1FA-A2CA-72C7-E6AF94B2EAF4}"/>
+              </a:ext>
+            </a:extLst>
+          </p:cNvPr>
+          <p:cNvSpPr txBox="1"/>
+          <p:nvPr/>
+        </p:nvSpPr>
+        <p:spPr>
+          <a:xfrm>
+            <a:off x="10293748" y="4574618"/>
+            <a:ext cx="1494058" cy="2062103"/>
+          </a:xfrm>
+          <a:prstGeom prst="rect">
+            <a:avLst/>
+          </a:prstGeom>
+          <a:noFill/>
+        </p:spPr>
+        <p:txBody>
+          <a:bodyPr wrap="square" rtlCol="0">
+            <a:spAutoFit/>
+          </a:bodyPr>
+          <a:lstStyle/>
+          <a:p>
+            <a:pPr marL="171450" indent="-171450">
+              <a:buFont typeface="Arial" panose="020B0604020202020204" pitchFamily="34" charset="0"/>
+              <a:buChar char="•"/>
+            </a:pPr>
+            <a:r>
+              <a:rPr lang="en-US" sz="800" dirty="0" err="1">
+                <a:solidFill>
+                  <a:schemeClr val="accent5"/>
+                </a:solidFill>
+              </a:rPr>
+              <a:t>reg_write</a:t>
+            </a:r>
+            <a:endParaRPr lang="en-US" sz="800" dirty="0">
+              <a:solidFill>
+                <a:schemeClr val="accent5"/>
+              </a:solidFill>
+            </a:endParaRPr>
+          </a:p>
+          <a:p>
+            <a:pPr marL="171450" indent="-171450">
+              <a:buFont typeface="Arial" panose="020B0604020202020204" pitchFamily="34" charset="0"/>
+              <a:buChar char="•"/>
+            </a:pPr>
+            <a:r>
+              <a:rPr lang="en-US" sz="800" dirty="0" err="1">
+                <a:solidFill>
+                  <a:schemeClr val="accent5"/>
+                </a:solidFill>
+              </a:rPr>
+              <a:t>alu_src</a:t>
+            </a:r>
+            <a:endParaRPr lang="en-US" sz="800" dirty="0">
+              <a:solidFill>
+                <a:schemeClr val="accent5"/>
+              </a:solidFill>
+            </a:endParaRPr>
+          </a:p>
+          <a:p>
+            <a:pPr marL="171450" indent="-171450">
+              <a:buFont typeface="Arial" panose="020B0604020202020204" pitchFamily="34" charset="0"/>
+              <a:buChar char="•"/>
+            </a:pPr>
+            <a:r>
+              <a:rPr lang="en-US" sz="800" dirty="0" err="1">
+                <a:solidFill>
+                  <a:schemeClr val="accent5"/>
+                </a:solidFill>
+              </a:rPr>
+              <a:t>mem_read</a:t>
+            </a:r>
+            <a:endParaRPr lang="en-US" sz="800" dirty="0">
+              <a:solidFill>
+                <a:schemeClr val="accent5"/>
+              </a:solidFill>
+            </a:endParaRPr>
+          </a:p>
+          <a:p>
+            <a:pPr marL="171450" indent="-171450">
+              <a:buFont typeface="Arial" panose="020B0604020202020204" pitchFamily="34" charset="0"/>
+              <a:buChar char="•"/>
+            </a:pPr>
+            <a:r>
+              <a:rPr lang="en-US" sz="800" dirty="0" err="1">
+                <a:solidFill>
+                  <a:schemeClr val="accent5"/>
+                </a:solidFill>
+              </a:rPr>
+              <a:t>mem_write</a:t>
+            </a:r>
+            <a:endParaRPr lang="en-US" sz="800" dirty="0">
+              <a:solidFill>
+                <a:schemeClr val="accent5"/>
+              </a:solidFill>
+            </a:endParaRPr>
+          </a:p>
+          <a:p>
+            <a:pPr marL="171450" indent="-171450">
+              <a:buFont typeface="Arial" panose="020B0604020202020204" pitchFamily="34" charset="0"/>
+              <a:buChar char="•"/>
+            </a:pPr>
+            <a:r>
+              <a:rPr lang="en-US" sz="800" dirty="0">
+                <a:solidFill>
+                  <a:schemeClr val="accent5"/>
+                </a:solidFill>
+              </a:rPr>
+              <a:t>branch</a:t>
+            </a:r>
+          </a:p>
+          <a:p>
+            <a:pPr marL="171450" indent="-171450">
+              <a:buFont typeface="Arial" panose="020B0604020202020204" pitchFamily="34" charset="0"/>
+              <a:buChar char="•"/>
+            </a:pPr>
+            <a:r>
+              <a:rPr lang="en-US" sz="800" dirty="0">
+                <a:solidFill>
+                  <a:schemeClr val="accent5"/>
+                </a:solidFill>
+              </a:rPr>
+              <a:t>jump</a:t>
+            </a:r>
+          </a:p>
+          <a:p>
+            <a:pPr marL="171450" indent="-171450">
+              <a:buFont typeface="Arial" panose="020B0604020202020204" pitchFamily="34" charset="0"/>
+              <a:buChar char="•"/>
+            </a:pPr>
+            <a:r>
+              <a:rPr lang="en-US" sz="800" dirty="0" err="1">
+                <a:solidFill>
+                  <a:schemeClr val="accent5"/>
+                </a:solidFill>
+              </a:rPr>
+              <a:t>load_addr</a:t>
+            </a:r>
+            <a:endParaRPr lang="en-US" sz="800" dirty="0">
+              <a:solidFill>
+                <a:schemeClr val="accent5"/>
+              </a:solidFill>
+            </a:endParaRPr>
+          </a:p>
+          <a:p>
+            <a:pPr marL="171450" indent="-171450">
+              <a:buFont typeface="Arial" panose="020B0604020202020204" pitchFamily="34" charset="0"/>
+              <a:buChar char="•"/>
+            </a:pPr>
+            <a:r>
+              <a:rPr lang="en-US" sz="800" dirty="0" err="1">
+                <a:solidFill>
+                  <a:schemeClr val="accent5"/>
+                </a:solidFill>
+              </a:rPr>
+              <a:t>npc</a:t>
+            </a:r>
+            <a:endParaRPr lang="en-US" sz="800" dirty="0">
+              <a:solidFill>
+                <a:schemeClr val="accent5"/>
+              </a:solidFill>
+            </a:endParaRPr>
+          </a:p>
+          <a:p>
+            <a:pPr marL="171450" indent="-171450">
+              <a:buFont typeface="Arial" panose="020B0604020202020204" pitchFamily="34" charset="0"/>
+              <a:buChar char="•"/>
+            </a:pPr>
+            <a:r>
+              <a:rPr lang="en-US" sz="800" dirty="0" err="1">
+                <a:solidFill>
+                  <a:schemeClr val="accent5"/>
+                </a:solidFill>
+              </a:rPr>
+              <a:t>alu_op</a:t>
+            </a:r>
+            <a:endParaRPr lang="en-US" sz="800" dirty="0">
+              <a:solidFill>
+                <a:schemeClr val="accent5"/>
+              </a:solidFill>
+            </a:endParaRPr>
+          </a:p>
+          <a:p>
+            <a:pPr marL="171450" indent="-171450">
+              <a:buFont typeface="Arial" panose="020B0604020202020204" pitchFamily="34" charset="0"/>
+              <a:buChar char="•"/>
+            </a:pPr>
+            <a:r>
+              <a:rPr lang="en-US" sz="800" dirty="0" err="1">
+                <a:solidFill>
+                  <a:schemeClr val="accent5"/>
+                </a:solidFill>
+              </a:rPr>
+              <a:t>imm</a:t>
+            </a:r>
+            <a:endParaRPr lang="en-US" sz="800" dirty="0">
+              <a:solidFill>
+                <a:schemeClr val="accent5"/>
+              </a:solidFill>
+            </a:endParaRPr>
+          </a:p>
+          <a:p>
+            <a:pPr marL="171450" indent="-171450">
+              <a:buFont typeface="Arial" panose="020B0604020202020204" pitchFamily="34" charset="0"/>
+              <a:buChar char="•"/>
+            </a:pPr>
+            <a:r>
+              <a:rPr lang="en-US" sz="800" dirty="0" err="1">
+                <a:solidFill>
+                  <a:schemeClr val="accent5"/>
+                </a:solidFill>
+              </a:rPr>
+              <a:t>instr</a:t>
+            </a:r>
+            <a:endParaRPr lang="en-US" sz="800" dirty="0">
+              <a:solidFill>
+                <a:schemeClr val="accent5"/>
+              </a:solidFill>
+            </a:endParaRPr>
+          </a:p>
+          <a:p>
+            <a:pPr marL="171450" indent="-171450">
+              <a:buFont typeface="Arial" panose="020B0604020202020204" pitchFamily="34" charset="0"/>
+              <a:buChar char="•"/>
+            </a:pPr>
+            <a:r>
+              <a:rPr lang="en-US" sz="800" dirty="0">
+                <a:solidFill>
+                  <a:schemeClr val="accent5"/>
+                </a:solidFill>
+              </a:rPr>
+              <a:t>reg1_data</a:t>
+            </a:r>
+          </a:p>
+          <a:p>
+            <a:pPr marL="171450" indent="-171450">
+              <a:buFont typeface="Arial" panose="020B0604020202020204" pitchFamily="34" charset="0"/>
+              <a:buChar char="•"/>
+            </a:pPr>
+            <a:r>
+              <a:rPr lang="en-US" sz="800" dirty="0">
+                <a:solidFill>
+                  <a:schemeClr val="accent5"/>
+                </a:solidFill>
+              </a:rPr>
+              <a:t>reg2_data</a:t>
+            </a:r>
+          </a:p>
+          <a:p>
+            <a:pPr marL="171450" indent="-171450">
+              <a:buFont typeface="Arial" panose="020B0604020202020204" pitchFamily="34" charset="0"/>
+              <a:buChar char="•"/>
+            </a:pPr>
+            <a:r>
+              <a:rPr lang="en-US" sz="800" dirty="0">
+                <a:solidFill>
+                  <a:schemeClr val="accent5"/>
+                </a:solidFill>
+              </a:rPr>
+              <a:t>rs1</a:t>
+            </a:r>
+          </a:p>
+          <a:p>
+            <a:pPr marL="171450" indent="-171450">
+              <a:buFont typeface="Arial" panose="020B0604020202020204" pitchFamily="34" charset="0"/>
+              <a:buChar char="•"/>
+            </a:pPr>
+            <a:r>
+              <a:rPr lang="en-US" sz="800" dirty="0">
+                <a:solidFill>
+                  <a:schemeClr val="accent5"/>
+                </a:solidFill>
+              </a:rPr>
+              <a:t>rs2</a:t>
+            </a:r>
+          </a:p>
+          <a:p>
+            <a:pPr marL="171450" indent="-171450">
+              <a:buFont typeface="Arial" panose="020B0604020202020204" pitchFamily="34" charset="0"/>
+              <a:buChar char="•"/>
+            </a:pPr>
+            <a:r>
+              <a:rPr lang="en-US" sz="800" dirty="0" err="1">
+                <a:solidFill>
+                  <a:schemeClr val="accent5"/>
+                </a:solidFill>
+              </a:rPr>
+              <a:t>rd</a:t>
+            </a:r>
+            <a:endParaRPr lang="en-US" sz="800" dirty="0">
+              <a:solidFill>
+                <a:schemeClr val="accent5"/>
+              </a:solidFill>
+            </a:endParaRPr>
+          </a:p>
+        </p:txBody>
+      </p:sp>
     </p:spTree>
     <p:extLst>
       <p:ext uri="{BB962C8B-B14F-4D97-AF65-F5344CB8AC3E}">
